--- a/docs/DriftSense_PS02.pptx
+++ b/docs/DriftSense_PS02.pptx
@@ -2359,1106 +2359,7 @@
 </p:sldMaster>
 </file>
 
-<file path=ppt/slides/slide10.xml><?xml version="1.0" encoding="utf-8"?>
-<p:sld xmlns:a="http://schemas.openxmlformats.org/drawingml/2006/main" xmlns:r="http://schemas.openxmlformats.org/officeDocument/2006/relationships" xmlns:p="http://schemas.openxmlformats.org/presentationml/2006/main">
-  <p:cSld>
-    <p:spTree>
-      <p:nvGrpSpPr>
-        <p:cNvPr id="1" name=""/>
-        <p:cNvGrpSpPr/>
-        <p:nvPr/>
-      </p:nvGrpSpPr>
-      <p:grpSpPr>
-        <a:xfrm>
-          <a:off x="0" y="0"/>
-          <a:ext cx="0" cy="0"/>
-          <a:chOff x="0" y="0"/>
-          <a:chExt cx="0" cy="0"/>
-        </a:xfrm>
-      </p:grpSpPr>
-      <p:sp>
-        <p:nvSpPr>
-          <p:cNvPr id="2" name="Shape 0"/>
-          <p:cNvSpPr/>
-          <p:nvPr/>
-        </p:nvSpPr>
-        <p:spPr>
-          <a:xfrm>
-            <a:off x="0" y="0"/>
-            <a:ext cx="12191695" cy="6858000"/>
-          </a:xfrm>
-          <a:prstGeom prst="rect">
-            <a:avLst/>
-          </a:prstGeom>
-          <a:solidFill>
-            <a:srgbClr val="000036"/>
-          </a:solidFill>
-          <a:ln/>
-        </p:spPr>
-        <p:txBody>
-          <a:bodyPr/>
-          <a:lstStyle/>
-          <a:p>
-            <a:endParaRPr lang="en-IN"/>
-          </a:p>
-        </p:txBody>
-      </p:sp>
-      <p:pic>
-        <p:nvPicPr>
-          <p:cNvPr id="3" name="Image 0" descr="preencoded.png"/>
-          <p:cNvPicPr>
-            <a:picLocks noChangeAspect="1"/>
-          </p:cNvPicPr>
-          <p:nvPr/>
-        </p:nvPicPr>
-        <p:blipFill>
-          <a:blip r:embed="rId3">
-            <a:alphaModFix amt="10000"/>
-          </a:blip>
-          <a:srcRect l="12327" r="12327"/>
-          <a:stretch/>
-        </p:blipFill>
-        <p:spPr>
-          <a:xfrm>
-            <a:off x="0" y="0"/>
-            <a:ext cx="12191695" cy="6858000"/>
-          </a:xfrm>
-          <a:prstGeom prst="rect">
-            <a:avLst/>
-          </a:prstGeom>
-        </p:spPr>
-      </p:pic>
-      <p:sp>
-        <p:nvSpPr>
-          <p:cNvPr id="4" name="Shape 1"/>
-          <p:cNvSpPr/>
-          <p:nvPr/>
-        </p:nvSpPr>
-        <p:spPr>
-          <a:xfrm>
-            <a:off x="571500" y="286207"/>
-            <a:ext cx="11048695" cy="666598"/>
-          </a:xfrm>
-          <a:prstGeom prst="roundRect">
-            <a:avLst>
-              <a:gd name="adj" fmla="val 15677"/>
-            </a:avLst>
-          </a:prstGeom>
-          <a:solidFill>
-            <a:srgbClr val="FFFFFF">
-              <a:alpha val="95000"/>
-            </a:srgbClr>
-          </a:solidFill>
-          <a:ln/>
-          <a:effectLst>
-            <a:outerShdw blurRad="63500" dist="38100" dir="5400000" algn="bl" rotWithShape="0">
-              <a:srgbClr val="000000">
-                <a:alpha val="10000"/>
-              </a:srgbClr>
-            </a:outerShdw>
-          </a:effectLst>
-        </p:spPr>
-        <p:txBody>
-          <a:bodyPr/>
-          <a:lstStyle/>
-          <a:p>
-            <a:endParaRPr lang="en-IN"/>
-          </a:p>
-        </p:txBody>
-      </p:sp>
-      <p:pic>
-        <p:nvPicPr>
-          <p:cNvPr id="5" name="Image 1" descr="preencoded.png"/>
-          <p:cNvPicPr>
-            <a:picLocks noChangeAspect="1"/>
-          </p:cNvPicPr>
-          <p:nvPr/>
-        </p:nvPicPr>
-        <p:blipFill>
-          <a:blip r:embed="rId4"/>
-          <a:srcRect t="10" b="10"/>
-          <a:stretch/>
-        </p:blipFill>
-        <p:spPr>
-          <a:xfrm>
-            <a:off x="857707" y="381305"/>
-            <a:ext cx="1266444" cy="476402"/>
-          </a:xfrm>
-          <a:prstGeom prst="rect">
-            <a:avLst/>
-          </a:prstGeom>
-        </p:spPr>
-      </p:pic>
-      <p:pic>
-        <p:nvPicPr>
-          <p:cNvPr id="6" name="Image 2" descr="preencoded.png"/>
-          <p:cNvPicPr>
-            <a:picLocks noChangeAspect="1"/>
-          </p:cNvPicPr>
-          <p:nvPr/>
-        </p:nvPicPr>
-        <p:blipFill>
-          <a:blip r:embed="rId5"/>
-          <a:srcRect/>
-          <a:stretch/>
-        </p:blipFill>
-        <p:spPr>
-          <a:xfrm>
-            <a:off x="10858500" y="381305"/>
-            <a:ext cx="476402" cy="476402"/>
-          </a:xfrm>
-          <a:prstGeom prst="rect">
-            <a:avLst/>
-          </a:prstGeom>
-        </p:spPr>
-      </p:pic>
-      <p:sp>
-        <p:nvSpPr>
-          <p:cNvPr id="7" name="Shape 2"/>
-          <p:cNvSpPr/>
-          <p:nvPr/>
-        </p:nvSpPr>
-        <p:spPr>
-          <a:xfrm>
-            <a:off x="571500" y="1190549"/>
-            <a:ext cx="75895" cy="409651"/>
-          </a:xfrm>
-          <a:prstGeom prst="rect">
-            <a:avLst/>
-          </a:prstGeom>
-          <a:solidFill>
-            <a:srgbClr val="88E555"/>
-          </a:solidFill>
-          <a:ln/>
-        </p:spPr>
-        <p:txBody>
-          <a:bodyPr/>
-          <a:lstStyle/>
-          <a:p>
-            <a:endParaRPr lang="en-IN"/>
-          </a:p>
-        </p:txBody>
-      </p:sp>
-      <p:sp>
-        <p:nvSpPr>
-          <p:cNvPr id="8" name="Text 3"/>
-          <p:cNvSpPr txBox="1"/>
-          <p:nvPr/>
-        </p:nvSpPr>
-        <p:spPr>
-          <a:xfrm>
-            <a:off x="838505" y="1152144"/>
-            <a:ext cx="4624121" cy="467258"/>
-          </a:xfrm>
-          <a:prstGeom prst="rect">
-            <a:avLst/>
-          </a:prstGeom>
-          <a:noFill/>
-          <a:ln/>
-        </p:spPr>
-        <p:txBody>
-          <a:bodyPr wrap="square" lIns="0" tIns="0" rIns="0" bIns="0" rtlCol="0" anchor="ctr"/>
-          <a:lstStyle/>
-          <a:p>
-            <a:pPr marL="0" indent="0" algn="l">
-              <a:buNone/>
-            </a:pPr>
-            <a:r>
-              <a:rPr lang="en-US" sz="2600" b="1" dirty="0">
-                <a:solidFill>
-                  <a:srgbClr val="FFFFFF"/>
-                </a:solidFill>
-                <a:latin typeface="Poppins" pitchFamily="34" charset="0"/>
-                <a:ea typeface="Poppins" pitchFamily="34" charset="-122"/>
-                <a:cs typeface="Poppins" pitchFamily="34" charset="-120"/>
-              </a:rPr>
-              <a:t>Research and References</a:t>
-            </a:r>
-            <a:endParaRPr lang="en-US" sz="2600" dirty="0"/>
-          </a:p>
-        </p:txBody>
-      </p:sp>
-      <p:sp>
-        <p:nvSpPr>
-          <p:cNvPr id="9" name="Shape 4"/>
-          <p:cNvSpPr/>
-          <p:nvPr/>
-        </p:nvSpPr>
-        <p:spPr>
-          <a:xfrm>
-            <a:off x="571500" y="1830629"/>
-            <a:ext cx="11048695" cy="4743907"/>
-          </a:xfrm>
-          <a:prstGeom prst="roundRect">
-            <a:avLst>
-              <a:gd name="adj" fmla="val 619"/>
-            </a:avLst>
-          </a:prstGeom>
-          <a:solidFill>
-            <a:srgbClr val="FFFFFF">
-              <a:alpha val="5000"/>
-            </a:srgbClr>
-          </a:solidFill>
-          <a:ln w="12700">
-            <a:solidFill>
-              <a:srgbClr val="88E555">
-                <a:alpha val="30000"/>
-              </a:srgbClr>
-            </a:solidFill>
-            <a:prstDash val="solid"/>
-          </a:ln>
-        </p:spPr>
-        <p:txBody>
-          <a:bodyPr/>
-          <a:lstStyle/>
-          <a:p>
-            <a:endParaRPr lang="en-IN"/>
-          </a:p>
-        </p:txBody>
-      </p:sp>
-      <p:sp>
-        <p:nvSpPr>
-          <p:cNvPr id="10" name="Shape 5"/>
-          <p:cNvSpPr/>
-          <p:nvPr/>
-        </p:nvSpPr>
-        <p:spPr>
-          <a:xfrm>
-            <a:off x="571500" y="1830629"/>
-            <a:ext cx="190195" cy="190195"/>
-          </a:xfrm>
-          <a:prstGeom prst="roundRect">
-            <a:avLst>
-              <a:gd name="adj" fmla="val 192308"/>
-            </a:avLst>
-          </a:prstGeom>
-          <a:noFill/>
-          <a:ln w="38100">
-            <a:solidFill>
-              <a:srgbClr val="88E555"/>
-            </a:solidFill>
-            <a:prstDash val="solid"/>
-          </a:ln>
-        </p:spPr>
-        <p:txBody>
-          <a:bodyPr/>
-          <a:lstStyle/>
-          <a:p>
-            <a:endParaRPr lang="en-IN"/>
-          </a:p>
-        </p:txBody>
-      </p:sp>
-      <p:sp>
-        <p:nvSpPr>
-          <p:cNvPr id="11" name="Shape 6"/>
-          <p:cNvSpPr/>
-          <p:nvPr/>
-        </p:nvSpPr>
-        <p:spPr>
-          <a:xfrm>
-            <a:off x="11430000" y="1830629"/>
-            <a:ext cx="190195" cy="190195"/>
-          </a:xfrm>
-          <a:prstGeom prst="rect">
-            <a:avLst/>
-          </a:prstGeom>
-          <a:noFill/>
-          <a:ln w="38100">
-            <a:solidFill>
-              <a:srgbClr val="88E555"/>
-            </a:solidFill>
-            <a:prstDash val="solid"/>
-          </a:ln>
-        </p:spPr>
-        <p:txBody>
-          <a:bodyPr/>
-          <a:lstStyle/>
-          <a:p>
-            <a:endParaRPr lang="en-IN"/>
-          </a:p>
-        </p:txBody>
-      </p:sp>
-      <p:sp>
-        <p:nvSpPr>
-          <p:cNvPr id="12" name="Shape 7"/>
-          <p:cNvSpPr/>
-          <p:nvPr/>
-        </p:nvSpPr>
-        <p:spPr>
-          <a:xfrm>
-            <a:off x="571500" y="6381598"/>
-            <a:ext cx="190195" cy="190195"/>
-          </a:xfrm>
-          <a:prstGeom prst="rect">
-            <a:avLst/>
-          </a:prstGeom>
-          <a:noFill/>
-          <a:ln w="38100">
-            <a:solidFill>
-              <a:srgbClr val="88E555"/>
-            </a:solidFill>
-            <a:prstDash val="solid"/>
-          </a:ln>
-        </p:spPr>
-        <p:txBody>
-          <a:bodyPr/>
-          <a:lstStyle/>
-          <a:p>
-            <a:endParaRPr lang="en-IN"/>
-          </a:p>
-        </p:txBody>
-      </p:sp>
-      <p:sp>
-        <p:nvSpPr>
-          <p:cNvPr id="13" name="Shape 8"/>
-          <p:cNvSpPr/>
-          <p:nvPr/>
-        </p:nvSpPr>
-        <p:spPr>
-          <a:xfrm>
-            <a:off x="11430000" y="6381598"/>
-            <a:ext cx="190195" cy="190195"/>
-          </a:xfrm>
-          <a:prstGeom prst="rect">
-            <a:avLst/>
-          </a:prstGeom>
-          <a:noFill/>
-          <a:ln w="38100">
-            <a:solidFill>
-              <a:srgbClr val="88E555"/>
-            </a:solidFill>
-            <a:prstDash val="solid"/>
-          </a:ln>
-        </p:spPr>
-        <p:txBody>
-          <a:bodyPr/>
-          <a:lstStyle/>
-          <a:p>
-            <a:endParaRPr lang="en-IN"/>
-          </a:p>
-        </p:txBody>
-      </p:sp>
-      <p:sp>
-        <p:nvSpPr>
-          <p:cNvPr id="14" name="Shape 9"/>
-          <p:cNvSpPr/>
-          <p:nvPr/>
-        </p:nvSpPr>
-        <p:spPr>
-          <a:xfrm>
-            <a:off x="961949" y="2173529"/>
-            <a:ext cx="476402" cy="476402"/>
-          </a:xfrm>
-          <a:prstGeom prst="ellipse">
-            <a:avLst/>
-          </a:prstGeom>
-          <a:solidFill>
-            <a:srgbClr val="273383">
-              <a:alpha val="50000"/>
-            </a:srgbClr>
-          </a:solidFill>
-          <a:ln w="25400">
-            <a:solidFill>
-              <a:srgbClr val="AEFF82"/>
-            </a:solidFill>
-            <a:prstDash val="solid"/>
-          </a:ln>
-        </p:spPr>
-        <p:txBody>
-          <a:bodyPr/>
-          <a:lstStyle/>
-          <a:p>
-            <a:endParaRPr lang="en-IN"/>
-          </a:p>
-        </p:txBody>
-      </p:sp>
-      <p:pic>
-        <p:nvPicPr>
-          <p:cNvPr id="15" name="Image 3" descr="preencoded.png"/>
-          <p:cNvPicPr>
-            <a:picLocks noChangeAspect="1"/>
-          </p:cNvPicPr>
-          <p:nvPr/>
-        </p:nvPicPr>
-        <p:blipFill>
-          <a:blip r:embed="rId6"/>
-          <a:srcRect/>
-          <a:stretch/>
-        </p:blipFill>
-        <p:spPr>
-          <a:xfrm>
-            <a:off x="1086307" y="2297887"/>
-            <a:ext cx="228600" cy="228600"/>
-          </a:xfrm>
-          <a:prstGeom prst="rect">
-            <a:avLst/>
-          </a:prstGeom>
-        </p:spPr>
-      </p:pic>
-      <p:sp>
-        <p:nvSpPr>
-          <p:cNvPr id="16" name="Text 10"/>
-          <p:cNvSpPr txBox="1"/>
-          <p:nvPr/>
-        </p:nvSpPr>
-        <p:spPr>
-          <a:xfrm>
-            <a:off x="1628546" y="2173529"/>
-            <a:ext cx="3810305" cy="267005"/>
-          </a:xfrm>
-          <a:prstGeom prst="rect">
-            <a:avLst/>
-          </a:prstGeom>
-          <a:noFill/>
-          <a:ln/>
-        </p:spPr>
-        <p:txBody>
-          <a:bodyPr wrap="square" lIns="0" tIns="0" rIns="0" bIns="0" rtlCol="0" anchor="ctr"/>
-          <a:lstStyle/>
-          <a:p>
-            <a:pPr marL="0" indent="0" algn="l">
-              <a:buNone/>
-            </a:pPr>
-            <a:r>
-              <a:rPr lang="en-US" sz="1500" b="1" dirty="0">
-                <a:solidFill>
-                  <a:srgbClr val="88E555"/>
-                </a:solidFill>
-                <a:latin typeface="Poppins" pitchFamily="34" charset="0"/>
-                <a:ea typeface="Poppins" pitchFamily="34" charset="-122"/>
-                <a:cs typeface="Poppins" pitchFamily="34" charset="-120"/>
-              </a:rPr>
-              <a:t>Research Background &amp; Methodology</a:t>
-            </a:r>
-            <a:endParaRPr lang="en-US" sz="1500" dirty="0"/>
-          </a:p>
-        </p:txBody>
-      </p:sp>
-      <p:sp>
-        <p:nvSpPr>
-          <p:cNvPr id="17" name="Text 11"/>
-          <p:cNvSpPr txBox="1"/>
-          <p:nvPr/>
-        </p:nvSpPr>
-        <p:spPr>
-          <a:xfrm>
-            <a:off x="1628546" y="2516429"/>
-            <a:ext cx="5701284" cy="191110"/>
-          </a:xfrm>
-          <a:prstGeom prst="rect">
-            <a:avLst/>
-          </a:prstGeom>
-          <a:noFill/>
-          <a:ln/>
-        </p:spPr>
-        <p:txBody>
-          <a:bodyPr wrap="square" lIns="0" tIns="0" rIns="0" bIns="0" rtlCol="0" anchor="ctr"/>
-          <a:lstStyle/>
-          <a:p>
-            <a:pPr marL="0" indent="0" algn="l">
-              <a:buNone/>
-            </a:pPr>
-            <a:r>
-              <a:rPr lang="en-US" sz="1000" dirty="0">
-                <a:solidFill>
-                  <a:srgbClr val="D1D5DB"/>
-                </a:solidFill>
-                <a:latin typeface="Poppins" pitchFamily="34" charset="0"/>
-                <a:ea typeface="Poppins" pitchFamily="34" charset="-122"/>
-                <a:cs typeface="Poppins" pitchFamily="34" charset="-120"/>
-              </a:rPr>
-              <a:t>The theory the method rests on, and the limits we state rather than hide.</a:t>
-            </a:r>
-            <a:endParaRPr lang="en-US" sz="1000" dirty="0"/>
-          </a:p>
-        </p:txBody>
-      </p:sp>
-      <p:sp>
-        <p:nvSpPr>
-          <p:cNvPr id="18" name="Shape 12"/>
-          <p:cNvSpPr/>
-          <p:nvPr/>
-        </p:nvSpPr>
-        <p:spPr>
-          <a:xfrm>
-            <a:off x="1628546" y="2783434"/>
-            <a:ext cx="9601200" cy="1300000"/>
-          </a:xfrm>
-          <a:prstGeom prst="roundRect">
-            <a:avLst>
-              <a:gd name="adj" fmla="val 6121"/>
-            </a:avLst>
-          </a:prstGeom>
-          <a:solidFill>
-            <a:srgbClr val="1E3A8A">
-              <a:alpha val="40000"/>
-            </a:srgbClr>
-          </a:solidFill>
-          <a:ln w="12700">
-            <a:solidFill>
-              <a:srgbClr val="1D4ED8"/>
-            </a:solidFill>
-            <a:prstDash val="solid"/>
-          </a:ln>
-        </p:spPr>
-        <p:txBody>
-          <a:bodyPr/>
-          <a:lstStyle/>
-          <a:p>
-            <a:endParaRPr lang="en-IN"/>
-          </a:p>
-        </p:txBody>
-      </p:sp>
-      <p:sp>
-        <p:nvSpPr>
-          <p:cNvPr id="19" name="Text 13"/>
-          <p:cNvSpPr txBox="1"/>
-          <p:nvPr/>
-        </p:nvSpPr>
-        <p:spPr>
-          <a:xfrm>
-            <a:off x="1790395" y="2945282"/>
-            <a:ext cx="5544007" cy="1050000"/>
-          </a:xfrm>
-          <a:prstGeom prst="rect">
-            <a:avLst/>
-          </a:prstGeom>
-          <a:noFill/>
-          <a:ln/>
-        </p:spPr>
-        <p:txBody>
-          <a:bodyPr wrap="square" lIns="0" tIns="0" rIns="0" bIns="0" rtlCol="0" anchor="ctr"/>
-          <a:lstStyle/>
-          <a:p>
-            <a:pPr marL="0" indent="0" algn="l">
-              <a:buNone/>
-            </a:pPr>
-            <a:r>
-              <a:rPr lang="en-US" sz="950" i="1" dirty="0">
-                <a:solidFill>
-                  <a:srgbClr val="FFFFFF">
-                    <a:alpha val="70000"/>
-                  </a:srgbClr>
-                </a:solidFill>
-                <a:latin typeface="Poppins" pitchFamily="34" charset="0"/>
-                <a:ea typeface="Poppins" pitchFamily="34" charset="-122"/>
-                <a:cs typeface="Poppins" pitchFamily="34" charset="-120"/>
-              </a:rPr>
-              <a:t>Disambiguation is posed as matched filtering: a tile's autocorrelation is its ambiguity function, so sidelobe height measures positional ambiguity directly.</a:t>
-            </a:r>
-            <a:endParaRPr lang="en-US" sz="1200" dirty="0"/>
-          </a:p>
-          <a:p>
-            <a:pPr marL="0" indent="0" algn="l">
-              <a:buNone/>
-            </a:pPr>
-            <a:r>
-              <a:rPr lang="en-US" sz="950" i="1" dirty="0">
-                <a:solidFill>
-                  <a:srgbClr val="FFFFFF">
-                    <a:alpha val="70000"/>
-                  </a:srgbClr>
-                </a:solidFill>
-                <a:latin typeface="Poppins" pitchFamily="34" charset="0"/>
-                <a:ea typeface="Poppins" pitchFamily="34" charset="-122"/>
-                <a:cs typeface="Poppins" pitchFamily="34" charset="-120"/>
-              </a:rPr>
-              <a:t>Layout dimensions are deliberately relaxed 1.5–5x from production silicon. At real ground rules the lattice reaches the 10 nm/px optic at 45% contrast, and at leading-edge fin pitch at 20% — at or below the shot-noise floor.</a:t>
-            </a:r>
-            <a:endParaRPr lang="en-US" sz="1200" dirty="0"/>
-          </a:p>
-          <a:p>
-            <a:pPr marL="0" indent="0" algn="l">
-              <a:buNone/>
-            </a:pPr>
-            <a:r>
-              <a:rPr lang="en-US" sz="950" i="1" dirty="0">
-                <a:solidFill>
-                  <a:srgbClr val="FFFFFF">
-                    <a:alpha val="70000"/>
-                  </a:srgbClr>
-                </a:solidFill>
-                <a:latin typeface="Poppins" pitchFamily="34" charset="0"/>
-                <a:ea typeface="Poppins" pitchFamily="34" charset="-122"/>
-                <a:cs typeface="Poppins" pitchFamily="34" charset="-120"/>
-              </a:rPr>
-              <a:t>Nyquist is not the binding constraint; contrast is. Every parameter is tagged as cited, partly cited, or a declared assumption.</a:t>
-            </a:r>
-            <a:endParaRPr lang="en-US" sz="1200" dirty="0"/>
-          </a:p>
-        </p:txBody>
-      </p:sp>
-      <p:sp>
-        <p:nvSpPr>
-          <p:cNvPr id="20" name="Shape 14"/>
-          <p:cNvSpPr/>
-          <p:nvPr/>
-        </p:nvSpPr>
-        <p:spPr>
-          <a:xfrm>
-            <a:off x="961949" y="4155034"/>
-            <a:ext cx="476402" cy="476402"/>
-          </a:xfrm>
-          <a:prstGeom prst="ellipse">
-            <a:avLst/>
-          </a:prstGeom>
-          <a:solidFill>
-            <a:srgbClr val="273383">
-              <a:alpha val="50000"/>
-            </a:srgbClr>
-          </a:solidFill>
-          <a:ln w="25400">
-            <a:solidFill>
-              <a:srgbClr val="AEFF82"/>
-            </a:solidFill>
-            <a:prstDash val="solid"/>
-          </a:ln>
-        </p:spPr>
-        <p:txBody>
-          <a:bodyPr/>
-          <a:lstStyle/>
-          <a:p>
-            <a:endParaRPr lang="en-IN"/>
-          </a:p>
-        </p:txBody>
-      </p:sp>
-      <p:pic>
-        <p:nvPicPr>
-          <p:cNvPr id="21" name="Image 4" descr="preencoded.png"/>
-          <p:cNvPicPr>
-            <a:picLocks noChangeAspect="1"/>
-          </p:cNvPicPr>
-          <p:nvPr/>
-        </p:nvPicPr>
-        <p:blipFill>
-          <a:blip r:embed="rId7"/>
-          <a:srcRect l="-80" r="-80"/>
-          <a:stretch/>
-        </p:blipFill>
-        <p:spPr>
-          <a:xfrm>
-            <a:off x="1057046" y="4279392"/>
-            <a:ext cx="286207" cy="228600"/>
-          </a:xfrm>
-          <a:prstGeom prst="rect">
-            <a:avLst/>
-          </a:prstGeom>
-        </p:spPr>
-      </p:pic>
-      <p:sp>
-        <p:nvSpPr>
-          <p:cNvPr id="22" name="Text 15"/>
-          <p:cNvSpPr txBox="1"/>
-          <p:nvPr/>
-        </p:nvSpPr>
-        <p:spPr>
-          <a:xfrm>
-            <a:off x="1628546" y="4155034"/>
-            <a:ext cx="2343607" cy="267005"/>
-          </a:xfrm>
-          <a:prstGeom prst="rect">
-            <a:avLst/>
-          </a:prstGeom>
-          <a:noFill/>
-          <a:ln/>
-        </p:spPr>
-        <p:txBody>
-          <a:bodyPr wrap="square" lIns="0" tIns="0" rIns="0" bIns="0" rtlCol="0" anchor="ctr"/>
-          <a:lstStyle/>
-          <a:p>
-            <a:pPr marL="0" indent="0" algn="l">
-              <a:buNone/>
-            </a:pPr>
-            <a:r>
-              <a:rPr lang="en-US" sz="1500" b="1" dirty="0">
-                <a:solidFill>
-                  <a:srgbClr val="88E555"/>
-                </a:solidFill>
-                <a:latin typeface="Poppins" pitchFamily="34" charset="0"/>
-                <a:ea typeface="Poppins" pitchFamily="34" charset="-122"/>
-                <a:cs typeface="Poppins" pitchFamily="34" charset="-120"/>
-              </a:rPr>
-              <a:t>References &amp; Citations</a:t>
-            </a:r>
-            <a:endParaRPr lang="en-US" sz="1500" dirty="0"/>
-          </a:p>
-        </p:txBody>
-      </p:sp>
-      <p:sp>
-        <p:nvSpPr>
-          <p:cNvPr id="23" name="Text 16"/>
-          <p:cNvSpPr txBox="1"/>
-          <p:nvPr/>
-        </p:nvSpPr>
-        <p:spPr>
-          <a:xfrm>
-            <a:off x="1628546" y="4497934"/>
-            <a:ext cx="2767889" cy="191110"/>
-          </a:xfrm>
-          <a:prstGeom prst="rect">
-            <a:avLst/>
-          </a:prstGeom>
-          <a:noFill/>
-          <a:ln/>
-        </p:spPr>
-        <p:txBody>
-          <a:bodyPr wrap="square" lIns="0" tIns="0" rIns="0" bIns="0" rtlCol="0" anchor="ctr"/>
-          <a:lstStyle/>
-          <a:p>
-            <a:pPr marL="0" indent="0" algn="l">
-              <a:buNone/>
-            </a:pPr>
-            <a:r>
-              <a:rPr lang="en-US" sz="1000" dirty="0">
-                <a:solidFill>
-                  <a:srgbClr val="D1D5DB"/>
-                </a:solidFill>
-                <a:latin typeface="Poppins" pitchFamily="34" charset="0"/>
-                <a:ea typeface="Poppins" pitchFamily="34" charset="-122"/>
-                <a:cs typeface="Poppins" pitchFamily="34" charset="-120"/>
-              </a:rPr>
-              <a:t>List key papers, articles, or data sources.</a:t>
-            </a:r>
-            <a:endParaRPr lang="en-US" sz="1000" dirty="0"/>
-          </a:p>
-        </p:txBody>
-      </p:sp>
-      <p:sp>
-        <p:nvSpPr>
-          <p:cNvPr id="24" name="Shape 17"/>
-          <p:cNvSpPr/>
-          <p:nvPr/>
-        </p:nvSpPr>
-        <p:spPr>
-          <a:xfrm>
-            <a:off x="1628546" y="4764938"/>
-            <a:ext cx="9601200" cy="1410005"/>
-          </a:xfrm>
-          <a:prstGeom prst="roundRect">
-            <a:avLst>
-              <a:gd name="adj" fmla="val 3505"/>
-            </a:avLst>
-          </a:prstGeom>
-          <a:solidFill>
-            <a:srgbClr val="1E3A8A">
-              <a:alpha val="40000"/>
-            </a:srgbClr>
-          </a:solidFill>
-          <a:ln w="12700">
-            <a:solidFill>
-              <a:srgbClr val="1D4ED8"/>
-            </a:solidFill>
-            <a:prstDash val="solid"/>
-          </a:ln>
-        </p:spPr>
-        <p:txBody>
-          <a:bodyPr/>
-          <a:lstStyle/>
-          <a:p>
-            <a:endParaRPr lang="en-IN"/>
-          </a:p>
-        </p:txBody>
-      </p:sp>
-      <p:sp>
-        <p:nvSpPr>
-          <p:cNvPr id="25" name="Shape 18"/>
-          <p:cNvSpPr/>
-          <p:nvPr/>
-        </p:nvSpPr>
-        <p:spPr>
-          <a:xfrm>
-            <a:off x="1790395" y="5232197"/>
-            <a:ext cx="9277502" cy="9144"/>
-          </a:xfrm>
-          <a:prstGeom prst="rect">
-            <a:avLst/>
-          </a:prstGeom>
-          <a:solidFill>
-            <a:srgbClr val="1E40AF">
-              <a:alpha val="30000"/>
-            </a:srgbClr>
-          </a:solidFill>
-          <a:ln/>
-        </p:spPr>
-        <p:txBody>
-          <a:bodyPr/>
-          <a:lstStyle/>
-          <a:p>
-            <a:endParaRPr lang="en-IN"/>
-          </a:p>
-        </p:txBody>
-      </p:sp>
-      <p:sp>
-        <p:nvSpPr>
-          <p:cNvPr id="26" name="Text 19"/>
-          <p:cNvSpPr txBox="1"/>
-          <p:nvPr/>
-        </p:nvSpPr>
-        <p:spPr>
-          <a:xfrm>
-            <a:off x="1790395" y="4926787"/>
-            <a:ext cx="3219602" cy="300000"/>
-          </a:xfrm>
-          <a:prstGeom prst="rect">
-            <a:avLst/>
-          </a:prstGeom>
-          <a:noFill/>
-          <a:ln/>
-        </p:spPr>
-        <p:txBody>
-          <a:bodyPr wrap="square" lIns="0" tIns="0" rIns="0" bIns="0" rtlCol="0" anchor="ctr"/>
-          <a:lstStyle/>
-          <a:p>
-            <a:pPr marL="0" indent="0" algn="l">
-              <a:buNone/>
-            </a:pPr>
-            <a:r>
-              <a:rPr lang="en-US" sz="1200" dirty="0">
-                <a:solidFill>
-                  <a:srgbClr val="FFFFFF">
-                    <a:alpha val="80000"/>
-                  </a:srgbClr>
-                </a:solidFill>
-                <a:latin typeface="Poppins" pitchFamily="34" charset="0"/>
-                <a:ea typeface="Poppins" pitchFamily="34" charset="-122"/>
-                <a:cs typeface="Poppins" pitchFamily="34" charset="-120"/>
-              </a:rPr>
-              <a:t>Lewis, J.P. (1995). Fast Normalized Cross-Correlation. Vision Interface.</a:t>
-            </a:r>
-            <a:endParaRPr lang="en-US" sz="1200" dirty="0"/>
-          </a:p>
-        </p:txBody>
-      </p:sp>
-      <p:sp>
-        <p:nvSpPr>
-          <p:cNvPr id="27" name="Shape 20"/>
-          <p:cNvSpPr/>
-          <p:nvPr/>
-        </p:nvSpPr>
-        <p:spPr>
-          <a:xfrm>
-            <a:off x="1790395" y="5661050"/>
-            <a:ext cx="9277502" cy="9144"/>
-          </a:xfrm>
-          <a:prstGeom prst="rect">
-            <a:avLst/>
-          </a:prstGeom>
-          <a:solidFill>
-            <a:srgbClr val="1E40AF">
-              <a:alpha val="30000"/>
-            </a:srgbClr>
-          </a:solidFill>
-          <a:ln/>
-        </p:spPr>
-        <p:txBody>
-          <a:bodyPr/>
-          <a:lstStyle/>
-          <a:p>
-            <a:endParaRPr lang="en-IN"/>
-          </a:p>
-        </p:txBody>
-      </p:sp>
-      <p:sp>
-        <p:nvSpPr>
-          <p:cNvPr id="28" name="Text 21"/>
-          <p:cNvSpPr txBox="1"/>
-          <p:nvPr/>
-        </p:nvSpPr>
-        <p:spPr>
-          <a:xfrm>
-            <a:off x="1790395" y="5355641"/>
-            <a:ext cx="3258007" cy="300000"/>
-          </a:xfrm>
-          <a:prstGeom prst="rect">
-            <a:avLst/>
-          </a:prstGeom>
-          <a:noFill/>
-          <a:ln/>
-        </p:spPr>
-        <p:txBody>
-          <a:bodyPr wrap="square" lIns="0" tIns="0" rIns="0" bIns="0" rtlCol="0" anchor="ctr"/>
-          <a:lstStyle/>
-          <a:p>
-            <a:pPr marL="0" indent="0" algn="l">
-              <a:buNone/>
-            </a:pPr>
-            <a:r>
-              <a:rPr lang="en-US" sz="1200" dirty="0">
-                <a:solidFill>
-                  <a:srgbClr val="FFFFFF">
-                    <a:alpha val="80000"/>
-                  </a:srgbClr>
-                </a:solidFill>
-                <a:latin typeface="Poppins" pitchFamily="34" charset="0"/>
-                <a:ea typeface="Poppins" pitchFamily="34" charset="-122"/>
-                <a:cs typeface="Poppins" pitchFamily="34" charset="-120"/>
-              </a:rPr>
-              <a:t>Reddy &amp; Chatterji (1996). FFT-based translation, rotation and scale-invariant registration. IEEE Trans. Image Processing 5(8).</a:t>
-            </a:r>
-            <a:endParaRPr lang="en-US" sz="1200" dirty="0"/>
-          </a:p>
-        </p:txBody>
-      </p:sp>
-      <p:sp>
-        <p:nvSpPr>
-          <p:cNvPr id="29" name="Text 22"/>
-          <p:cNvSpPr txBox="1"/>
-          <p:nvPr/>
-        </p:nvSpPr>
-        <p:spPr>
-          <a:xfrm>
-            <a:off x="1790395" y="5783580"/>
-            <a:ext cx="3258007" cy="300000"/>
-          </a:xfrm>
-          <a:prstGeom prst="rect">
-            <a:avLst/>
-          </a:prstGeom>
-          <a:noFill/>
-          <a:ln/>
-        </p:spPr>
-        <p:txBody>
-          <a:bodyPr wrap="square" lIns="0" tIns="0" rIns="0" bIns="0" rtlCol="0" anchor="ctr"/>
-          <a:lstStyle/>
-          <a:p>
-            <a:pPr marL="0" indent="0" algn="l">
-              <a:buNone/>
-            </a:pPr>
-            <a:r>
-              <a:rPr lang="en-US" sz="1200" dirty="0">
-                <a:solidFill>
-                  <a:srgbClr val="FFFFFF">
-                    <a:alpha val="80000"/>
-                  </a:srgbClr>
-                </a:solidFill>
-                <a:latin typeface="Poppins" pitchFamily="34" charset="0"/>
-                <a:ea typeface="Poppins" pitchFamily="34" charset="-122"/>
-                <a:cs typeface="Poppins" pitchFamily="34" charset="-120"/>
-              </a:rPr>
-              <a:t>Guizar-Sicairos, Thurman &amp; Fienup (2008). Efficient subpixel image registration. Optics Letters 33(2).</a:t>
-            </a:r>
-            <a:endParaRPr lang="en-US" sz="1200" dirty="0"/>
-          </a:p>
-        </p:txBody>
-      </p:sp>
-      <p:pic>
-        <p:nvPicPr>
-          <p:cNvPr id="30" name="Picture 29">
-            <a:extLst>
-              <a:ext uri="{FF2B5EF4-FFF2-40B4-BE49-F238E27FC236}">
-                <a16:creationId xmlns:a16="http://schemas.microsoft.com/office/drawing/2014/main" id="{135E3709-F1C8-6E84-EA51-720EFCF71B26}"/>
-              </a:ext>
-            </a:extLst>
-          </p:cNvPr>
-          <p:cNvPicPr>
-            <a:picLocks noChangeAspect="1"/>
-          </p:cNvPicPr>
-          <p:nvPr/>
-        </p:nvPicPr>
-        <p:blipFill>
-          <a:blip r:embed="rId8"/>
-          <a:stretch>
-            <a:fillRect/>
-          </a:stretch>
-        </p:blipFill>
-        <p:spPr>
-          <a:xfrm>
-            <a:off x="5292164" y="227710"/>
-            <a:ext cx="1607366" cy="783591"/>
-          </a:xfrm>
-          <a:prstGeom prst="rect">
-            <a:avLst/>
-          </a:prstGeom>
-        </p:spPr>
-      </p:pic>
-      <p:sp>
-        <p:nvSpPr>
-          <p:cNvPr id="32" name="Shape 1">
-            <a:extLst>
-              <a:ext uri="{FF2B5EF4-FFF2-40B4-BE49-F238E27FC236}">
-                <a16:creationId xmlns:a16="http://schemas.microsoft.com/office/drawing/2014/main" id="{3E27E131-AC1D-E75C-0267-02565ACC1BC3}"/>
-              </a:ext>
-            </a:extLst>
-          </p:cNvPr>
-          <p:cNvSpPr/>
-          <p:nvPr/>
-        </p:nvSpPr>
-        <p:spPr>
-          <a:xfrm>
-            <a:off x="571500" y="259714"/>
-            <a:ext cx="11048695" cy="857707"/>
-          </a:xfrm>
-          <a:prstGeom prst="roundRect">
-            <a:avLst>
-              <a:gd name="adj" fmla="val 9476"/>
-            </a:avLst>
-          </a:prstGeom>
-          <a:solidFill>
-            <a:srgbClr val="FFFFFF">
-              <a:alpha val="95000"/>
-            </a:srgbClr>
-          </a:solidFill>
-          <a:ln/>
-          <a:effectLst>
-            <a:outerShdw blurRad="63500" dist="38100" dir="5400000" algn="bl" rotWithShape="0">
-              <a:srgbClr val="000000">
-                <a:alpha val="10000"/>
-              </a:srgbClr>
-            </a:outerShdw>
-          </a:effectLst>
-        </p:spPr>
-        <p:txBody>
-          <a:bodyPr/>
-          <a:lstStyle/>
-          <a:p>
-            <a:endParaRPr lang="en-IN"/>
-          </a:p>
-        </p:txBody>
-      </p:sp>
-      <p:pic>
-        <p:nvPicPr>
-          <p:cNvPr id="33" name="Picture 32">
-            <a:extLst>
-              <a:ext uri="{FF2B5EF4-FFF2-40B4-BE49-F238E27FC236}">
-                <a16:creationId xmlns:a16="http://schemas.microsoft.com/office/drawing/2014/main" id="{1D876DBE-D402-1B41-B952-69F6F5BF98C9}"/>
-              </a:ext>
-            </a:extLst>
-          </p:cNvPr>
-          <p:cNvPicPr>
-            <a:picLocks noChangeAspect="1"/>
-          </p:cNvPicPr>
-          <p:nvPr/>
-        </p:nvPicPr>
-        <p:blipFill>
-          <a:blip r:embed="rId9">
-            <a:extLst>
-              <a:ext uri="{28A0092B-C50C-407E-A947-70E740481C1C}">
-                <a14:useLocalDpi xmlns:a14="http://schemas.microsoft.com/office/drawing/2010/main" val="0"/>
-              </a:ext>
-            </a:extLst>
-          </a:blip>
-          <a:stretch>
-            <a:fillRect/>
-          </a:stretch>
-        </p:blipFill>
-        <p:spPr>
-          <a:xfrm>
-            <a:off x="1514101" y="390016"/>
-            <a:ext cx="9163491" cy="586435"/>
-          </a:xfrm>
-          <a:prstGeom prst="rect">
-            <a:avLst/>
-          </a:prstGeom>
-        </p:spPr>
-      </p:pic>
-    </p:spTree>
-  </p:cSld>
-  <p:clrMapOvr>
-    <a:masterClrMapping/>
-  </p:clrMapOvr>
-</p:sld>
-</file>
-
-<file path=ppt/slides/slide2.xml><?xml version="1.0" encoding="utf-8"?>
+<file path=ppt/slides/slide1.xml><?xml version="1.0" encoding="utf-8"?>
 <p:sld xmlns:a="http://schemas.openxmlformats.org/drawingml/2006/main" xmlns:r="http://schemas.openxmlformats.org/officeDocument/2006/relationships" xmlns:p="http://schemas.openxmlformats.org/presentationml/2006/main">
   <p:cSld name="Slide 2">
     <p:spTree>
@@ -5673,7 +4574,7 @@
 </p:sld>
 </file>
 
-<file path=ppt/slides/slide3.xml><?xml version="1.0" encoding="utf-8"?>
+<file path=ppt/slides/slide2.xml><?xml version="1.0" encoding="utf-8"?>
 <p:sld xmlns:a="http://schemas.openxmlformats.org/drawingml/2006/main" xmlns:r="http://schemas.openxmlformats.org/officeDocument/2006/relationships" xmlns:p="http://schemas.openxmlformats.org/presentationml/2006/main">
   <p:cSld name="Slide 3">
     <p:spTree>
@@ -6357,7 +5258,7 @@
 </p:sld>
 </file>
 
-<file path=ppt/slides/slide5.xml><?xml version="1.0" encoding="utf-8"?>
+<file path=ppt/slides/slide3.xml><?xml version="1.0" encoding="utf-8"?>
 <p:sld xmlns:a="http://schemas.openxmlformats.org/drawingml/2006/main" xmlns:r="http://schemas.openxmlformats.org/officeDocument/2006/relationships" xmlns:p="http://schemas.openxmlformats.org/presentationml/2006/main">
   <p:cSld name="Slide 5">
     <p:spTree>
@@ -7152,7 +6053,7 @@
 </p:sld>
 </file>
 
-<file path=ppt/slides/slide7.xml><?xml version="1.0" encoding="utf-8"?>
+<file path=ppt/slides/slide4.xml><?xml version="1.0" encoding="utf-8"?>
 <p:sld xmlns:a="http://schemas.openxmlformats.org/drawingml/2006/main" xmlns:r="http://schemas.openxmlformats.org/officeDocument/2006/relationships" xmlns:p="http://schemas.openxmlformats.org/presentationml/2006/main">
   <p:cSld name="Slide 7">
     <p:spTree>
@@ -7638,7 +6539,7 @@
         <p:spPr>
           <a:xfrm>
             <a:off x="961949" y="4210812"/>
-            <a:ext cx="5020056" cy="2050000"/>
+            <a:ext cx="3291840" cy="2240280"/>
           </a:xfrm>
           <a:prstGeom prst="roundRect">
             <a:avLst>
@@ -7736,7 +6637,7 @@
         <p:spPr>
           <a:xfrm>
             <a:off x="1200607" y="4791456"/>
-            <a:ext cx="4148633" cy="1150000"/>
+            <a:ext cx="2816352" cy="1344168"/>
           </a:xfrm>
           <a:prstGeom prst="rect">
             <a:avLst/>
@@ -7791,8 +6692,8 @@
         </p:nvSpPr>
         <p:spPr>
           <a:xfrm>
-            <a:off x="6210605" y="4210812"/>
-            <a:ext cx="5020056" cy="2050000"/>
+            <a:off x="4453128" y="4210812"/>
+            <a:ext cx="3291840" cy="2240280"/>
           </a:xfrm>
           <a:prstGeom prst="roundRect">
             <a:avLst>
@@ -7834,7 +6735,7 @@
         </p:blipFill>
         <p:spPr>
           <a:xfrm>
-            <a:off x="6448349" y="4486961"/>
+            <a:off x="4690872" y="4486961"/>
             <a:ext cx="171907" cy="152705"/>
           </a:xfrm>
           <a:prstGeom prst="rect">
@@ -7850,7 +6751,7 @@
         </p:nvSpPr>
         <p:spPr>
           <a:xfrm>
-            <a:off x="6734556" y="4448556"/>
+            <a:off x="4977079" y="4448556"/>
             <a:ext cx="1924812" cy="219456"/>
           </a:xfrm>
           <a:prstGeom prst="rect">
@@ -7889,8 +6790,8 @@
         </p:nvSpPr>
         <p:spPr>
           <a:xfrm>
-            <a:off x="6448349" y="4791456"/>
-            <a:ext cx="3986784" cy="1150000"/>
+            <a:off x="4690872" y="4791456"/>
+            <a:ext cx="2816352" cy="1344168"/>
           </a:xfrm>
           <a:prstGeom prst="rect">
             <a:avLst/>
@@ -7931,7 +6832,7 @@
                 <a:ea typeface="Poppins" pitchFamily="34" charset="-122"/>
                 <a:cs typeface="Poppins" pitchFamily="34" charset="-120"/>
               </a:rPr>
-              <a:t>Development set: 93.8% at 1 px, against a plain-NCC baseline of 75.3%.</a:t>
+              <a:t>Development set: 93.8% at 1 px against a plain-NCC baseline of 75.3%.</a:t>
             </a:r>
             <a:endParaRPr lang="en-US" sz="1000" dirty="0"/>
           </a:p>
@@ -7952,23 +6853,6 @@
             </a:r>
             <a:endParaRPr lang="en-US" sz="1000" dirty="0"/>
           </a:p>
-          <a:p>
-            <a:pPr marL="0" indent="0" algn="l">
-              <a:buNone/>
-            </a:pPr>
-            <a:r>
-              <a:rPr lang="en-US" sz="1000" dirty="0">
-                <a:solidFill>
-                  <a:srgbClr val="D1D5DB"/>
-                </a:solidFill>
-                <a:latin typeface="Poppins" pitchFamily="34" charset="0"/>
-                <a:ea typeface="Poppins" pitchFamily="34" charset="-122"/>
-                <a:cs typeface="Poppins" pitchFamily="34" charset="-120"/>
-              </a:rPr>
-              <a:t>The unsolvable stratum scores 0% by construction, and is flagged rather than guessed.</a:t>
-            </a:r>
-            <a:endParaRPr lang="en-US" sz="1000" dirty="0"/>
-          </a:p>
         </p:txBody>
       </p:sp>
       <p:pic>
@@ -8081,6 +6965,160 @@
           </a:prstGeom>
         </p:spPr>
       </p:pic>
+      <p:sp>
+        <p:nvSpPr>
+          <p:cNvPr id="17" name="Shape 11"/>
+          <p:cNvSpPr/>
+          <p:nvPr/>
+        </p:nvSpPr>
+        <p:spPr>
+          <a:xfrm>
+            <a:off x="7938821" y="4210812"/>
+            <a:ext cx="3291840" cy="2240280"/>
+          </a:xfrm>
+          <a:prstGeom prst="roundRect">
+            <a:avLst>
+              <a:gd name="adj" fmla="val 4836"/>
+            </a:avLst>
+          </a:prstGeom>
+          <a:solidFill>
+            <a:srgbClr val="1E3A8A">
+              <a:alpha val="40000"/>
+            </a:srgbClr>
+          </a:solidFill>
+          <a:ln w="12700">
+            <a:solidFill>
+              <a:srgbClr val="1D4ED8"/>
+            </a:solidFill>
+            <a:prstDash val="solid"/>
+          </a:ln>
+        </p:spPr>
+        <p:txBody>
+          <a:bodyPr/>
+          <a:lstStyle/>
+          <a:p>
+            <a:endParaRPr lang="en-IN"/>
+          </a:p>
+        </p:txBody>
+      </p:sp>
+      <p:pic>
+        <p:nvPicPr>
+          <p:cNvPr id="18" name="Image 4" descr="preencoded.png"/>
+          <p:cNvPicPr>
+            <a:picLocks noChangeAspect="1"/>
+          </p:cNvPicPr>
+          <p:nvPr/>
+        </p:nvPicPr>
+        <p:blipFill>
+          <a:blip r:embed="rId7"/>
+          <a:srcRect/>
+          <a:stretch/>
+        </p:blipFill>
+        <p:spPr>
+          <a:xfrm>
+            <a:off x="8177479" y="4486961"/>
+            <a:ext cx="152705" cy="152705"/>
+          </a:xfrm>
+          <a:prstGeom prst="rect">
+            <a:avLst/>
+          </a:prstGeom>
+        </p:spPr>
+      </p:pic>
+      <p:sp>
+        <p:nvSpPr>
+          <p:cNvPr id="19" name="Text 12"/>
+          <p:cNvSpPr txBox="1"/>
+          <p:nvPr/>
+        </p:nvSpPr>
+        <p:spPr>
+          <a:xfrm>
+            <a:off x="8443570" y="4448556"/>
+            <a:ext cx="1783080" cy="219456"/>
+          </a:xfrm>
+          <a:prstGeom prst="rect">
+            <a:avLst/>
+          </a:prstGeom>
+          <a:noFill/>
+          <a:ln/>
+        </p:spPr>
+        <p:txBody>
+          <a:bodyPr wrap="square" lIns="0" tIns="0" rIns="0" bIns="0" rtlCol="0" anchor="ctr"/>
+          <a:lstStyle/>
+          <a:p>
+            <a:pPr marL="0" indent="0" algn="l">
+              <a:buNone/>
+            </a:pPr>
+            <a:r>
+              <a:rPr lang="en-US" sz="1200" b="1" dirty="0">
+                <a:solidFill>
+                  <a:srgbClr val="FFFFFF"/>
+                </a:solidFill>
+                <a:latin typeface="Poppins" pitchFamily="34" charset="0"/>
+                <a:ea typeface="Poppins" pitchFamily="34" charset="-122"/>
+                <a:cs typeface="Poppins" pitchFamily="34" charset="-120"/>
+              </a:rPr>
+              <a:t>What It Gets Wrong</a:t>
+            </a:r>
+            <a:endParaRPr lang="en-US" sz="1200" dirty="0"/>
+          </a:p>
+        </p:txBody>
+      </p:sp>
+      <p:sp>
+        <p:nvSpPr>
+          <p:cNvPr id="20" name="Text 13"/>
+          <p:cNvSpPr txBox="1"/>
+          <p:nvPr/>
+        </p:nvSpPr>
+        <p:spPr>
+          <a:xfrm>
+            <a:off x="8177479" y="4791456"/>
+            <a:ext cx="2816352" cy="1344168"/>
+          </a:xfrm>
+          <a:prstGeom prst="rect">
+            <a:avLst/>
+          </a:prstGeom>
+          <a:noFill/>
+          <a:ln/>
+        </p:spPr>
+        <p:txBody>
+          <a:bodyPr wrap="square" lIns="0" tIns="0" rIns="0" bIns="0" rtlCol="0" anchor="ctr"/>
+          <a:lstStyle/>
+          <a:p>
+            <a:pPr marL="0" indent="0" algn="l">
+              <a:buNone/>
+            </a:pPr>
+            <a:r>
+              <a:rPr lang="en-US" sz="1000" dirty="0">
+                <a:solidFill>
+                  <a:srgbClr val="D1D5DB"/>
+                </a:solidFill>
+                <a:latin typeface="Poppins" pitchFamily="34" charset="0"/>
+                <a:ea typeface="Poppins" pitchFamily="34" charset="-122"/>
+                <a:cs typeface="Poppins" pitchFamily="34" charset="-120"/>
+              </a:rPr>
+              <a:t>Accuracy generalised; our confidence measure did not. The holdout accepted two unflagged answers and both were wrong, by 1.49 and 1.66 px.</a:t>
+            </a:r>
+            <a:endParaRPr lang="en-US" sz="1000" dirty="0"/>
+          </a:p>
+          <a:p>
+            <a:pPr marL="0" indent="0" algn="l">
+              <a:buNone/>
+            </a:pPr>
+            <a:r>
+              <a:rPr lang="en-US" sz="1000" dirty="0">
+                <a:solidFill>
+                  <a:srgbClr val="D1D5DB"/>
+                </a:solidFill>
+                <a:latin typeface="Poppins" pitchFamily="34" charset="0"/>
+                <a:ea typeface="Poppins" pitchFamily="34" charset="-122"/>
+                <a:cs typeface="Poppins" pitchFamily="34" charset="-120"/>
+              </a:rPr>
+              <a:t>PSR cannot tell a correct peak from a confident one on a periodic lattice, so thresholds stay untuned.</a:t>
+            </a:r>
+            <a:endParaRPr lang="en-US" sz="1000" dirty="0"/>
+          </a:p>
+        </p:txBody>
+      </p:sp>
     </p:spTree>
   </p:cSld>
   <p:clrMapOvr>
@@ -8089,7 +7127,7 @@
 </p:sld>
 </file>
 
-<file path=ppt/slides/slide8.xml><?xml version="1.0" encoding="utf-8"?>
+<file path=ppt/slides/slide5.xml><?xml version="1.0" encoding="utf-8"?>
 <p:sld xmlns:a="http://schemas.openxmlformats.org/drawingml/2006/main" xmlns:r="http://schemas.openxmlformats.org/officeDocument/2006/relationships" xmlns:p="http://schemas.openxmlformats.org/presentationml/2006/main">
   <p:cSld name="Slide 8">
     <p:spTree>
@@ -8733,7 +7771,7 @@
                 <a:ea typeface="Poppins" pitchFamily="34" charset="-122"/>
                 <a:cs typeface="Poppins" pitchFamily="34" charset="-120"/>
               </a:rPr>
-              <a:t>578 tests, CI on every push, and a clean-room check that unpacks the archive and runs it with no developer environment present.</a:t>
+              <a:t>588 tests, CI on every push, and a clean-room check that unpacks the archive and runs it with no developer environment present.</a:t>
             </a:r>
             <a:endParaRPr lang="en-US" sz="1300" dirty="0"/>
           </a:p>
@@ -8747,8 +7785,8 @@
         </p:nvSpPr>
         <p:spPr>
           <a:xfrm>
-            <a:off x="961949" y="5252314"/>
-            <a:ext cx="3295498" cy="933602"/>
+            <a:off x="960120" y="5193792"/>
+            <a:ext cx="10268712" cy="1353312"/>
           </a:xfrm>
           <a:prstGeom prst="roundRect">
             <a:avLst>
@@ -8779,268 +7817,6 @@
       </p:sp>
       <p:pic>
         <p:nvPicPr>
-          <p:cNvPr id="21" name="Image 4" descr="preencoded.png"/>
-          <p:cNvPicPr>
-            <a:picLocks noChangeAspect="1"/>
-          </p:cNvPicPr>
-          <p:nvPr/>
-        </p:nvPicPr>
-        <p:blipFill>
-          <a:blip r:embed="rId7"/>
-          <a:srcRect t="-45" b="-45"/>
-          <a:stretch/>
-        </p:blipFill>
-        <p:spPr>
-          <a:xfrm>
-            <a:off x="2481682" y="5451653"/>
-            <a:ext cx="256946" cy="228600"/>
-          </a:xfrm>
-          <a:prstGeom prst="rect">
-            <a:avLst/>
-          </a:prstGeom>
-        </p:spPr>
-      </p:pic>
-      <p:sp>
-        <p:nvSpPr>
-          <p:cNvPr id="22" name="Text 15"/>
-          <p:cNvSpPr txBox="1"/>
-          <p:nvPr/>
-        </p:nvSpPr>
-        <p:spPr>
-          <a:xfrm>
-            <a:off x="1861718" y="5823814"/>
-            <a:ext cx="1608430" cy="191110"/>
-          </a:xfrm>
-          <a:prstGeom prst="rect">
-            <a:avLst/>
-          </a:prstGeom>
-          <a:noFill/>
-          <a:ln/>
-        </p:spPr>
-        <p:txBody>
-          <a:bodyPr wrap="square" lIns="0" tIns="0" rIns="0" bIns="0" rtlCol="0" anchor="ctr"/>
-          <a:lstStyle/>
-          <a:p>
-            <a:pPr marL="0" indent="0" algn="ctr">
-              <a:buNone/>
-            </a:pPr>
-            <a:r>
-              <a:rPr lang="en-US" sz="1000" dirty="0">
-                <a:solidFill>
-                  <a:srgbClr val="E2E8F0"/>
-                </a:solidFill>
-                <a:latin typeface="Poppins" pitchFamily="34" charset="0"/>
-                <a:ea typeface="Poppins" pitchFamily="34" charset="-122"/>
-                <a:cs typeface="Poppins" pitchFamily="34" charset="-120"/>
-              </a:rPr>
-              <a:t>Software Architecture</a:t>
-            </a:r>
-            <a:endParaRPr lang="en-US" sz="1000" dirty="0"/>
-          </a:p>
-        </p:txBody>
-      </p:sp>
-      <p:sp>
-        <p:nvSpPr>
-          <p:cNvPr id="23" name="Shape 16"/>
-          <p:cNvSpPr/>
-          <p:nvPr/>
-        </p:nvSpPr>
-        <p:spPr>
-          <a:xfrm>
-            <a:off x="4448556" y="5252314"/>
-            <a:ext cx="3295498" cy="933602"/>
-          </a:xfrm>
-          <a:prstGeom prst="roundRect">
-            <a:avLst>
-              <a:gd name="adj" fmla="val 7995"/>
-            </a:avLst>
-          </a:prstGeom>
-          <a:solidFill>
-            <a:srgbClr val="273383">
-              <a:alpha val="40000"/>
-            </a:srgbClr>
-          </a:solidFill>
-          <a:ln w="12700">
-            <a:solidFill>
-              <a:srgbClr val="88E555">
-                <a:alpha val="20000"/>
-              </a:srgbClr>
-            </a:solidFill>
-            <a:prstDash val="solid"/>
-          </a:ln>
-        </p:spPr>
-        <p:txBody>
-          <a:bodyPr/>
-          <a:lstStyle/>
-          <a:p>
-            <a:endParaRPr lang="en-IN"/>
-          </a:p>
-        </p:txBody>
-      </p:sp>
-      <p:pic>
-        <p:nvPicPr>
-          <p:cNvPr id="24" name="Image 5" descr="preencoded.png"/>
-          <p:cNvPicPr>
-            <a:picLocks noChangeAspect="1"/>
-          </p:cNvPicPr>
-          <p:nvPr/>
-        </p:nvPicPr>
-        <p:blipFill>
-          <a:blip r:embed="rId8"/>
-          <a:srcRect/>
-          <a:stretch/>
-        </p:blipFill>
-        <p:spPr>
-          <a:xfrm>
-            <a:off x="5982005" y="5451653"/>
-            <a:ext cx="228600" cy="228600"/>
-          </a:xfrm>
-          <a:prstGeom prst="rect">
-            <a:avLst/>
-          </a:prstGeom>
-        </p:spPr>
-      </p:pic>
-      <p:sp>
-        <p:nvSpPr>
-          <p:cNvPr id="25" name="Text 17"/>
-          <p:cNvSpPr txBox="1"/>
-          <p:nvPr/>
-        </p:nvSpPr>
-        <p:spPr>
-          <a:xfrm>
-            <a:off x="5287061" y="5823814"/>
-            <a:ext cx="1722730" cy="191110"/>
-          </a:xfrm>
-          <a:prstGeom prst="rect">
-            <a:avLst/>
-          </a:prstGeom>
-          <a:noFill/>
-          <a:ln/>
-        </p:spPr>
-        <p:txBody>
-          <a:bodyPr wrap="square" lIns="0" tIns="0" rIns="0" bIns="0" rtlCol="0" anchor="ctr"/>
-          <a:lstStyle/>
-          <a:p>
-            <a:pPr marL="0" indent="0" algn="ctr">
-              <a:buNone/>
-            </a:pPr>
-            <a:r>
-              <a:rPr lang="en-US" sz="1000" dirty="0">
-                <a:solidFill>
-                  <a:srgbClr val="E2E8F0"/>
-                </a:solidFill>
-                <a:latin typeface="Poppins" pitchFamily="34" charset="0"/>
-                <a:ea typeface="Poppins" pitchFamily="34" charset="-122"/>
-                <a:cs typeface="Poppins" pitchFamily="34" charset="-120"/>
-              </a:rPr>
-              <a:t>Hardware Components</a:t>
-            </a:r>
-            <a:endParaRPr lang="en-US" sz="1000" dirty="0"/>
-          </a:p>
-        </p:txBody>
-      </p:sp>
-      <p:sp>
-        <p:nvSpPr>
-          <p:cNvPr id="26" name="Shape 18"/>
-          <p:cNvSpPr/>
-          <p:nvPr/>
-        </p:nvSpPr>
-        <p:spPr>
-          <a:xfrm>
-            <a:off x="7934249" y="5252314"/>
-            <a:ext cx="3295498" cy="933602"/>
-          </a:xfrm>
-          <a:prstGeom prst="roundRect">
-            <a:avLst>
-              <a:gd name="adj" fmla="val 7995"/>
-            </a:avLst>
-          </a:prstGeom>
-          <a:solidFill>
-            <a:srgbClr val="273383">
-              <a:alpha val="40000"/>
-            </a:srgbClr>
-          </a:solidFill>
-          <a:ln w="12700">
-            <a:solidFill>
-              <a:srgbClr val="88E555">
-                <a:alpha val="20000"/>
-              </a:srgbClr>
-            </a:solidFill>
-            <a:prstDash val="solid"/>
-          </a:ln>
-        </p:spPr>
-        <p:txBody>
-          <a:bodyPr/>
-          <a:lstStyle/>
-          <a:p>
-            <a:endParaRPr lang="en-IN"/>
-          </a:p>
-        </p:txBody>
-      </p:sp>
-      <p:pic>
-        <p:nvPicPr>
-          <p:cNvPr id="27" name="Image 6" descr="preencoded.png"/>
-          <p:cNvPicPr>
-            <a:picLocks noChangeAspect="1"/>
-          </p:cNvPicPr>
-          <p:nvPr/>
-        </p:nvPicPr>
-        <p:blipFill>
-          <a:blip r:embed="rId9"/>
-          <a:srcRect/>
-          <a:stretch/>
-        </p:blipFill>
-        <p:spPr>
-          <a:xfrm>
-            <a:off x="9467698" y="5451653"/>
-            <a:ext cx="228600" cy="228600"/>
-          </a:xfrm>
-          <a:prstGeom prst="rect">
-            <a:avLst/>
-          </a:prstGeom>
-        </p:spPr>
-      </p:pic>
-      <p:sp>
-        <p:nvSpPr>
-          <p:cNvPr id="28" name="Text 19"/>
-          <p:cNvSpPr txBox="1"/>
-          <p:nvPr/>
-        </p:nvSpPr>
-        <p:spPr>
-          <a:xfrm>
-            <a:off x="8919058" y="5823814"/>
-            <a:ext cx="1436522" cy="191110"/>
-          </a:xfrm>
-          <a:prstGeom prst="rect">
-            <a:avLst/>
-          </a:prstGeom>
-          <a:noFill/>
-          <a:ln/>
-        </p:spPr>
-        <p:txBody>
-          <a:bodyPr wrap="square" lIns="0" tIns="0" rIns="0" bIns="0" rtlCol="0" anchor="ctr"/>
-          <a:lstStyle/>
-          <a:p>
-            <a:pPr marL="0" indent="0" algn="ctr">
-              <a:buNone/>
-            </a:pPr>
-            <a:r>
-              <a:rPr lang="en-US" sz="1000" dirty="0">
-                <a:solidFill>
-                  <a:srgbClr val="E2E8F0"/>
-                </a:solidFill>
-                <a:latin typeface="Poppins" pitchFamily="34" charset="0"/>
-                <a:ea typeface="Poppins" pitchFamily="34" charset="-122"/>
-                <a:cs typeface="Poppins" pitchFamily="34" charset="-120"/>
-              </a:rPr>
-              <a:t>Development Tools</a:t>
-            </a:r>
-            <a:endParaRPr lang="en-US" sz="1000" dirty="0"/>
-          </a:p>
-        </p:txBody>
-      </p:sp>
-      <p:pic>
-        <p:nvPicPr>
           <p:cNvPr id="29" name="Picture 28">
             <a:extLst>
               <a:ext uri="{FF2B5EF4-FFF2-40B4-BE49-F238E27FC236}">
@@ -9149,6 +7925,129 @@
           </a:prstGeom>
         </p:spPr>
       </p:pic>
+      <p:pic>
+        <p:nvPicPr>
+          <p:cNvPr id="33" name="Picture 32" descr="ground_truth_overlay.png"/>
+          <p:cNvPicPr>
+            <a:picLocks noChangeAspect="1"/>
+          </p:cNvPicPr>
+          <p:nvPr/>
+        </p:nvPicPr>
+        <p:blipFill>
+          <a:blip r:embed="rId12"/>
+          <a:stretch>
+            <a:fillRect/>
+          </a:stretch>
+        </p:blipFill>
+        <p:spPr>
+          <a:xfrm>
+            <a:off x="1197864" y="5303520"/>
+            <a:ext cx="2788920" cy="1042415"/>
+          </a:xfrm>
+          <a:prstGeom prst="rect">
+            <a:avLst/>
+          </a:prstGeom>
+        </p:spPr>
+      </p:pic>
+      <p:sp>
+        <p:nvSpPr>
+          <p:cNvPr id="22" name="Text 15"/>
+          <p:cNvSpPr txBox="1"/>
+          <p:nvPr/>
+        </p:nvSpPr>
+        <p:spPr>
+          <a:xfrm>
+            <a:off x="1197864" y="6382512"/>
+            <a:ext cx="2926080" cy="146304"/>
+          </a:xfrm>
+          <a:prstGeom prst="rect">
+            <a:avLst/>
+          </a:prstGeom>
+          <a:noFill/>
+          <a:ln/>
+        </p:spPr>
+        <p:txBody>
+          <a:bodyPr wrap="square" lIns="0" tIns="0" rIns="0" bIns="0" rtlCol="0" anchor="ctr"/>
+          <a:lstStyle/>
+          <a:p>
+            <a:pPr marL="0" indent="0" algn="ctr">
+              <a:buNone/>
+            </a:pPr>
+            <a:r>
+              <a:rPr lang="en-US" sz="800" dirty="0">
+                <a:solidFill>
+                  <a:srgbClr val="E2E8F0"/>
+                </a:solidFill>
+                <a:latin typeface="Poppins" pitchFamily="34" charset="0"/>
+                <a:ea typeface="Poppins" pitchFamily="34" charset="-122"/>
+                <a:cs typeface="Poppins" pitchFamily="34" charset="-120"/>
+              </a:rPr>
+              <a:t>Ground truth rebuilt from the search image alone.</a:t>
+            </a:r>
+            <a:endParaRPr lang="en-US" sz="1000" dirty="0"/>
+          </a:p>
+        </p:txBody>
+      </p:sp>
+      <p:sp>
+        <p:nvSpPr>
+          <p:cNvPr id="19" name="Text 13"/>
+          <p:cNvSpPr txBox="1"/>
+          <p:nvPr/>
+        </p:nvSpPr>
+        <p:spPr>
+          <a:xfrm>
+            <a:off x="4389120" y="5303520"/>
+            <a:ext cx="6675120" cy="1234440"/>
+          </a:xfrm>
+          <a:prstGeom prst="rect">
+            <a:avLst/>
+          </a:prstGeom>
+          <a:noFill/>
+          <a:ln/>
+        </p:spPr>
+        <p:txBody>
+          <a:bodyPr wrap="square" lIns="0" tIns="0" rIns="0" bIns="0" rtlCol="0" anchor="ctr"/>
+          <a:lstStyle/>
+          <a:p>
+            <a:pPr marL="0" indent="0" algn="l">
+              <a:buNone/>
+            </a:pPr>
+            <a:r>
+              <a:rPr lang="en-US" sz="950" i="1" dirty="0">
+                <a:solidFill>
+                  <a:srgbClr val="FFFFFF">
+                    <a:alpha val="70000"/>
+                  </a:srgbClr>
+                </a:solidFill>
+                <a:latin typeface="Poppins" pitchFamily="34" charset="0"/>
+                <a:ea typeface="Poppins" pitchFamily="34" charset="-122"/>
+                <a:cs typeface="Poppins" pitchFamily="34" charset="-120"/>
+              </a:rPr>
+              <a:t>Through the 10 nm/px search optic DRAM pitch retains 87–94% of its contrast and FinFET fin pitch only 58–78%: two periodicities, one strongly attenuated. Nyquist is not the binding constraint — contrast is (IRDS 2023 More Moore §5.1).</a:t>
+            </a:r>
+            <a:endParaRPr lang="en-US" sz="1300" dirty="0"/>
+          </a:p>
+          <a:p>
+            <a:pPr marL="0" indent="0" algn="l">
+              <a:buNone/>
+            </a:pPr>
+            <a:r>
+              <a:rPr lang="en-US" sz="950" i="1" dirty="0">
+                <a:solidFill>
+                  <a:srgbClr val="FFFFFF">
+                    <a:alpha val="70000"/>
+                  </a:srgbClr>
+                </a:solidFill>
+                <a:latin typeface="Poppins" pitchFamily="34" charset="0"/>
+                <a:ea typeface="Poppins" pitchFamily="34" charset="-122"/>
+                <a:cs typeface="Poppins" pitchFamily="34" charset="-120"/>
+              </a:rPr>
+              <a:t>RGB bonus: visible light cannot resolve this layout. Incoherent imaging passes nothing above 2·NA/λ, so at NA 0.95 the finest surviving period is 237 nm (blue) to 337 nm (red), against a 72–108 nm fin pitch. Measured, the best channel retains ~6% of the geometry's contrast.</a:t>
+            </a:r>
+            <a:endParaRPr lang="en-US" sz="1300" dirty="0"/>
+          </a:p>
+        </p:txBody>
+      </p:sp>
     </p:spTree>
   </p:cSld>
   <p:clrMapOvr>
@@ -9157,7 +8056,7 @@
 </p:sld>
 </file>
 
-<file path=ppt/slides/slide9.xml><?xml version="1.0" encoding="utf-8"?>
+<file path=ppt/slides/slide6.xml><?xml version="1.0" encoding="utf-8"?>
 <p:sld xmlns:a="http://schemas.openxmlformats.org/drawingml/2006/main" xmlns:r="http://schemas.openxmlformats.org/officeDocument/2006/relationships" xmlns:p="http://schemas.openxmlformats.org/presentationml/2006/main">
   <p:cSld>
     <p:spTree>
@@ -10109,6 +9008,1105 @@
         <p:spPr>
           <a:xfrm>
             <a:off x="1514101" y="297181"/>
+            <a:ext cx="9163491" cy="586435"/>
+          </a:xfrm>
+          <a:prstGeom prst="rect">
+            <a:avLst/>
+          </a:prstGeom>
+        </p:spPr>
+      </p:pic>
+    </p:spTree>
+  </p:cSld>
+  <p:clrMapOvr>
+    <a:masterClrMapping/>
+  </p:clrMapOvr>
+</p:sld>
+</file>
+
+<file path=ppt/slides/slide7.xml><?xml version="1.0" encoding="utf-8"?>
+<p:sld xmlns:a="http://schemas.openxmlformats.org/drawingml/2006/main" xmlns:r="http://schemas.openxmlformats.org/officeDocument/2006/relationships" xmlns:p="http://schemas.openxmlformats.org/presentationml/2006/main">
+  <p:cSld>
+    <p:spTree>
+      <p:nvGrpSpPr>
+        <p:cNvPr id="1" name=""/>
+        <p:cNvGrpSpPr/>
+        <p:nvPr/>
+      </p:nvGrpSpPr>
+      <p:grpSpPr>
+        <a:xfrm>
+          <a:off x="0" y="0"/>
+          <a:ext cx="0" cy="0"/>
+          <a:chOff x="0" y="0"/>
+          <a:chExt cx="0" cy="0"/>
+        </a:xfrm>
+      </p:grpSpPr>
+      <p:sp>
+        <p:nvSpPr>
+          <p:cNvPr id="2" name="Shape 0"/>
+          <p:cNvSpPr/>
+          <p:nvPr/>
+        </p:nvSpPr>
+        <p:spPr>
+          <a:xfrm>
+            <a:off x="0" y="0"/>
+            <a:ext cx="12191695" cy="6858000"/>
+          </a:xfrm>
+          <a:prstGeom prst="rect">
+            <a:avLst/>
+          </a:prstGeom>
+          <a:solidFill>
+            <a:srgbClr val="000036"/>
+          </a:solidFill>
+          <a:ln/>
+        </p:spPr>
+        <p:txBody>
+          <a:bodyPr/>
+          <a:lstStyle/>
+          <a:p>
+            <a:endParaRPr lang="en-IN"/>
+          </a:p>
+        </p:txBody>
+      </p:sp>
+      <p:pic>
+        <p:nvPicPr>
+          <p:cNvPr id="3" name="Image 0" descr="preencoded.png"/>
+          <p:cNvPicPr>
+            <a:picLocks noChangeAspect="1"/>
+          </p:cNvPicPr>
+          <p:nvPr/>
+        </p:nvPicPr>
+        <p:blipFill>
+          <a:blip r:embed="rId3">
+            <a:alphaModFix amt="10000"/>
+          </a:blip>
+          <a:srcRect l="12327" r="12327"/>
+          <a:stretch/>
+        </p:blipFill>
+        <p:spPr>
+          <a:xfrm>
+            <a:off x="0" y="0"/>
+            <a:ext cx="12191695" cy="6858000"/>
+          </a:xfrm>
+          <a:prstGeom prst="rect">
+            <a:avLst/>
+          </a:prstGeom>
+        </p:spPr>
+      </p:pic>
+      <p:sp>
+        <p:nvSpPr>
+          <p:cNvPr id="4" name="Shape 1"/>
+          <p:cNvSpPr/>
+          <p:nvPr/>
+        </p:nvSpPr>
+        <p:spPr>
+          <a:xfrm>
+            <a:off x="571500" y="286207"/>
+            <a:ext cx="11048695" cy="666598"/>
+          </a:xfrm>
+          <a:prstGeom prst="roundRect">
+            <a:avLst>
+              <a:gd name="adj" fmla="val 15677"/>
+            </a:avLst>
+          </a:prstGeom>
+          <a:solidFill>
+            <a:srgbClr val="FFFFFF">
+              <a:alpha val="95000"/>
+            </a:srgbClr>
+          </a:solidFill>
+          <a:ln/>
+          <a:effectLst>
+            <a:outerShdw blurRad="63500" dist="38100" dir="5400000" algn="bl" rotWithShape="0">
+              <a:srgbClr val="000000">
+                <a:alpha val="10000"/>
+              </a:srgbClr>
+            </a:outerShdw>
+          </a:effectLst>
+        </p:spPr>
+        <p:txBody>
+          <a:bodyPr/>
+          <a:lstStyle/>
+          <a:p>
+            <a:endParaRPr lang="en-IN"/>
+          </a:p>
+        </p:txBody>
+      </p:sp>
+      <p:pic>
+        <p:nvPicPr>
+          <p:cNvPr id="5" name="Image 1" descr="preencoded.png"/>
+          <p:cNvPicPr>
+            <a:picLocks noChangeAspect="1"/>
+          </p:cNvPicPr>
+          <p:nvPr/>
+        </p:nvPicPr>
+        <p:blipFill>
+          <a:blip r:embed="rId4"/>
+          <a:srcRect t="10" b="10"/>
+          <a:stretch/>
+        </p:blipFill>
+        <p:spPr>
+          <a:xfrm>
+            <a:off x="857707" y="381305"/>
+            <a:ext cx="1266444" cy="476402"/>
+          </a:xfrm>
+          <a:prstGeom prst="rect">
+            <a:avLst/>
+          </a:prstGeom>
+        </p:spPr>
+      </p:pic>
+      <p:pic>
+        <p:nvPicPr>
+          <p:cNvPr id="6" name="Image 2" descr="preencoded.png"/>
+          <p:cNvPicPr>
+            <a:picLocks noChangeAspect="1"/>
+          </p:cNvPicPr>
+          <p:nvPr/>
+        </p:nvPicPr>
+        <p:blipFill>
+          <a:blip r:embed="rId5"/>
+          <a:srcRect/>
+          <a:stretch/>
+        </p:blipFill>
+        <p:spPr>
+          <a:xfrm>
+            <a:off x="10858500" y="381305"/>
+            <a:ext cx="476402" cy="476402"/>
+          </a:xfrm>
+          <a:prstGeom prst="rect">
+            <a:avLst/>
+          </a:prstGeom>
+        </p:spPr>
+      </p:pic>
+      <p:sp>
+        <p:nvSpPr>
+          <p:cNvPr id="7" name="Shape 2"/>
+          <p:cNvSpPr/>
+          <p:nvPr/>
+        </p:nvSpPr>
+        <p:spPr>
+          <a:xfrm>
+            <a:off x="571500" y="1190549"/>
+            <a:ext cx="75895" cy="409651"/>
+          </a:xfrm>
+          <a:prstGeom prst="rect">
+            <a:avLst/>
+          </a:prstGeom>
+          <a:solidFill>
+            <a:srgbClr val="88E555"/>
+          </a:solidFill>
+          <a:ln/>
+        </p:spPr>
+        <p:txBody>
+          <a:bodyPr/>
+          <a:lstStyle/>
+          <a:p>
+            <a:endParaRPr lang="en-IN"/>
+          </a:p>
+        </p:txBody>
+      </p:sp>
+      <p:sp>
+        <p:nvSpPr>
+          <p:cNvPr id="8" name="Text 3"/>
+          <p:cNvSpPr txBox="1"/>
+          <p:nvPr/>
+        </p:nvSpPr>
+        <p:spPr>
+          <a:xfrm>
+            <a:off x="838505" y="1152144"/>
+            <a:ext cx="4624121" cy="467258"/>
+          </a:xfrm>
+          <a:prstGeom prst="rect">
+            <a:avLst/>
+          </a:prstGeom>
+          <a:noFill/>
+          <a:ln/>
+        </p:spPr>
+        <p:txBody>
+          <a:bodyPr wrap="square" lIns="0" tIns="0" rIns="0" bIns="0" rtlCol="0" anchor="ctr"/>
+          <a:lstStyle/>
+          <a:p>
+            <a:pPr marL="0" indent="0" algn="l">
+              <a:buNone/>
+            </a:pPr>
+            <a:r>
+              <a:rPr lang="en-US" sz="2600" b="1" dirty="0">
+                <a:solidFill>
+                  <a:srgbClr val="FFFFFF"/>
+                </a:solidFill>
+                <a:latin typeface="Poppins" pitchFamily="34" charset="0"/>
+                <a:ea typeface="Poppins" pitchFamily="34" charset="-122"/>
+                <a:cs typeface="Poppins" pitchFamily="34" charset="-120"/>
+              </a:rPr>
+              <a:t>Research and References</a:t>
+            </a:r>
+            <a:endParaRPr lang="en-US" sz="2600" dirty="0"/>
+          </a:p>
+        </p:txBody>
+      </p:sp>
+      <p:sp>
+        <p:nvSpPr>
+          <p:cNvPr id="9" name="Shape 4"/>
+          <p:cNvSpPr/>
+          <p:nvPr/>
+        </p:nvSpPr>
+        <p:spPr>
+          <a:xfrm>
+            <a:off x="571500" y="1830629"/>
+            <a:ext cx="11048695" cy="4743907"/>
+          </a:xfrm>
+          <a:prstGeom prst="roundRect">
+            <a:avLst>
+              <a:gd name="adj" fmla="val 619"/>
+            </a:avLst>
+          </a:prstGeom>
+          <a:solidFill>
+            <a:srgbClr val="FFFFFF">
+              <a:alpha val="5000"/>
+            </a:srgbClr>
+          </a:solidFill>
+          <a:ln w="12700">
+            <a:solidFill>
+              <a:srgbClr val="88E555">
+                <a:alpha val="30000"/>
+              </a:srgbClr>
+            </a:solidFill>
+            <a:prstDash val="solid"/>
+          </a:ln>
+        </p:spPr>
+        <p:txBody>
+          <a:bodyPr/>
+          <a:lstStyle/>
+          <a:p>
+            <a:endParaRPr lang="en-IN"/>
+          </a:p>
+        </p:txBody>
+      </p:sp>
+      <p:sp>
+        <p:nvSpPr>
+          <p:cNvPr id="10" name="Shape 5"/>
+          <p:cNvSpPr/>
+          <p:nvPr/>
+        </p:nvSpPr>
+        <p:spPr>
+          <a:xfrm>
+            <a:off x="571500" y="1830629"/>
+            <a:ext cx="190195" cy="190195"/>
+          </a:xfrm>
+          <a:prstGeom prst="roundRect">
+            <a:avLst>
+              <a:gd name="adj" fmla="val 192308"/>
+            </a:avLst>
+          </a:prstGeom>
+          <a:noFill/>
+          <a:ln w="38100">
+            <a:solidFill>
+              <a:srgbClr val="88E555"/>
+            </a:solidFill>
+            <a:prstDash val="solid"/>
+          </a:ln>
+        </p:spPr>
+        <p:txBody>
+          <a:bodyPr/>
+          <a:lstStyle/>
+          <a:p>
+            <a:endParaRPr lang="en-IN"/>
+          </a:p>
+        </p:txBody>
+      </p:sp>
+      <p:sp>
+        <p:nvSpPr>
+          <p:cNvPr id="11" name="Shape 6"/>
+          <p:cNvSpPr/>
+          <p:nvPr/>
+        </p:nvSpPr>
+        <p:spPr>
+          <a:xfrm>
+            <a:off x="11430000" y="1830629"/>
+            <a:ext cx="190195" cy="190195"/>
+          </a:xfrm>
+          <a:prstGeom prst="rect">
+            <a:avLst/>
+          </a:prstGeom>
+          <a:noFill/>
+          <a:ln w="38100">
+            <a:solidFill>
+              <a:srgbClr val="88E555"/>
+            </a:solidFill>
+            <a:prstDash val="solid"/>
+          </a:ln>
+        </p:spPr>
+        <p:txBody>
+          <a:bodyPr/>
+          <a:lstStyle/>
+          <a:p>
+            <a:endParaRPr lang="en-IN"/>
+          </a:p>
+        </p:txBody>
+      </p:sp>
+      <p:sp>
+        <p:nvSpPr>
+          <p:cNvPr id="12" name="Shape 7"/>
+          <p:cNvSpPr/>
+          <p:nvPr/>
+        </p:nvSpPr>
+        <p:spPr>
+          <a:xfrm>
+            <a:off x="571500" y="6381598"/>
+            <a:ext cx="190195" cy="190195"/>
+          </a:xfrm>
+          <a:prstGeom prst="rect">
+            <a:avLst/>
+          </a:prstGeom>
+          <a:noFill/>
+          <a:ln w="38100">
+            <a:solidFill>
+              <a:srgbClr val="88E555"/>
+            </a:solidFill>
+            <a:prstDash val="solid"/>
+          </a:ln>
+        </p:spPr>
+        <p:txBody>
+          <a:bodyPr/>
+          <a:lstStyle/>
+          <a:p>
+            <a:endParaRPr lang="en-IN"/>
+          </a:p>
+        </p:txBody>
+      </p:sp>
+      <p:sp>
+        <p:nvSpPr>
+          <p:cNvPr id="13" name="Shape 8"/>
+          <p:cNvSpPr/>
+          <p:nvPr/>
+        </p:nvSpPr>
+        <p:spPr>
+          <a:xfrm>
+            <a:off x="11430000" y="6381598"/>
+            <a:ext cx="190195" cy="190195"/>
+          </a:xfrm>
+          <a:prstGeom prst="rect">
+            <a:avLst/>
+          </a:prstGeom>
+          <a:noFill/>
+          <a:ln w="38100">
+            <a:solidFill>
+              <a:srgbClr val="88E555"/>
+            </a:solidFill>
+            <a:prstDash val="solid"/>
+          </a:ln>
+        </p:spPr>
+        <p:txBody>
+          <a:bodyPr/>
+          <a:lstStyle/>
+          <a:p>
+            <a:endParaRPr lang="en-IN"/>
+          </a:p>
+        </p:txBody>
+      </p:sp>
+      <p:sp>
+        <p:nvSpPr>
+          <p:cNvPr id="14" name="Shape 9"/>
+          <p:cNvSpPr/>
+          <p:nvPr/>
+        </p:nvSpPr>
+        <p:spPr>
+          <a:xfrm>
+            <a:off x="961949" y="2173529"/>
+            <a:ext cx="476402" cy="476402"/>
+          </a:xfrm>
+          <a:prstGeom prst="ellipse">
+            <a:avLst/>
+          </a:prstGeom>
+          <a:solidFill>
+            <a:srgbClr val="273383">
+              <a:alpha val="50000"/>
+            </a:srgbClr>
+          </a:solidFill>
+          <a:ln w="25400">
+            <a:solidFill>
+              <a:srgbClr val="AEFF82"/>
+            </a:solidFill>
+            <a:prstDash val="solid"/>
+          </a:ln>
+        </p:spPr>
+        <p:txBody>
+          <a:bodyPr/>
+          <a:lstStyle/>
+          <a:p>
+            <a:endParaRPr lang="en-IN"/>
+          </a:p>
+        </p:txBody>
+      </p:sp>
+      <p:pic>
+        <p:nvPicPr>
+          <p:cNvPr id="15" name="Image 3" descr="preencoded.png"/>
+          <p:cNvPicPr>
+            <a:picLocks noChangeAspect="1"/>
+          </p:cNvPicPr>
+          <p:nvPr/>
+        </p:nvPicPr>
+        <p:blipFill>
+          <a:blip r:embed="rId6"/>
+          <a:srcRect/>
+          <a:stretch/>
+        </p:blipFill>
+        <p:spPr>
+          <a:xfrm>
+            <a:off x="1086307" y="2297887"/>
+            <a:ext cx="228600" cy="228600"/>
+          </a:xfrm>
+          <a:prstGeom prst="rect">
+            <a:avLst/>
+          </a:prstGeom>
+        </p:spPr>
+      </p:pic>
+      <p:sp>
+        <p:nvSpPr>
+          <p:cNvPr id="16" name="Text 10"/>
+          <p:cNvSpPr txBox="1"/>
+          <p:nvPr/>
+        </p:nvSpPr>
+        <p:spPr>
+          <a:xfrm>
+            <a:off x="1628546" y="2173529"/>
+            <a:ext cx="3810305" cy="267005"/>
+          </a:xfrm>
+          <a:prstGeom prst="rect">
+            <a:avLst/>
+          </a:prstGeom>
+          <a:noFill/>
+          <a:ln/>
+        </p:spPr>
+        <p:txBody>
+          <a:bodyPr wrap="square" lIns="0" tIns="0" rIns="0" bIns="0" rtlCol="0" anchor="ctr"/>
+          <a:lstStyle/>
+          <a:p>
+            <a:pPr marL="0" indent="0" algn="l">
+              <a:buNone/>
+            </a:pPr>
+            <a:r>
+              <a:rPr lang="en-US" sz="1500" b="1" dirty="0">
+                <a:solidFill>
+                  <a:srgbClr val="88E555"/>
+                </a:solidFill>
+                <a:latin typeface="Poppins" pitchFamily="34" charset="0"/>
+                <a:ea typeface="Poppins" pitchFamily="34" charset="-122"/>
+                <a:cs typeface="Poppins" pitchFamily="34" charset="-120"/>
+              </a:rPr>
+              <a:t>Research Background &amp; Methodology</a:t>
+            </a:r>
+            <a:endParaRPr lang="en-US" sz="1500" dirty="0"/>
+          </a:p>
+        </p:txBody>
+      </p:sp>
+      <p:sp>
+        <p:nvSpPr>
+          <p:cNvPr id="17" name="Text 11"/>
+          <p:cNvSpPr txBox="1"/>
+          <p:nvPr/>
+        </p:nvSpPr>
+        <p:spPr>
+          <a:xfrm>
+            <a:off x="1628546" y="2516429"/>
+            <a:ext cx="5701284" cy="191110"/>
+          </a:xfrm>
+          <a:prstGeom prst="rect">
+            <a:avLst/>
+          </a:prstGeom>
+          <a:noFill/>
+          <a:ln/>
+        </p:spPr>
+        <p:txBody>
+          <a:bodyPr wrap="square" lIns="0" tIns="0" rIns="0" bIns="0" rtlCol="0" anchor="ctr"/>
+          <a:lstStyle/>
+          <a:p>
+            <a:pPr marL="0" indent="0" algn="l">
+              <a:buNone/>
+            </a:pPr>
+            <a:r>
+              <a:rPr lang="en-US" sz="1000" dirty="0">
+                <a:solidFill>
+                  <a:srgbClr val="D1D5DB"/>
+                </a:solidFill>
+                <a:latin typeface="Poppins" pitchFamily="34" charset="0"/>
+                <a:ea typeface="Poppins" pitchFamily="34" charset="-122"/>
+                <a:cs typeface="Poppins" pitchFamily="34" charset="-120"/>
+              </a:rPr>
+              <a:t>The theory the method rests on, and the limits we state rather than hide.</a:t>
+            </a:r>
+            <a:endParaRPr lang="en-US" sz="1000" dirty="0"/>
+          </a:p>
+        </p:txBody>
+      </p:sp>
+      <p:sp>
+        <p:nvSpPr>
+          <p:cNvPr id="18" name="Shape 12"/>
+          <p:cNvSpPr/>
+          <p:nvPr/>
+        </p:nvSpPr>
+        <p:spPr>
+          <a:xfrm>
+            <a:off x="1628546" y="2783434"/>
+            <a:ext cx="9601200" cy="1300000"/>
+          </a:xfrm>
+          <a:prstGeom prst="roundRect">
+            <a:avLst>
+              <a:gd name="adj" fmla="val 6121"/>
+            </a:avLst>
+          </a:prstGeom>
+          <a:solidFill>
+            <a:srgbClr val="1E3A8A">
+              <a:alpha val="40000"/>
+            </a:srgbClr>
+          </a:solidFill>
+          <a:ln w="12700">
+            <a:solidFill>
+              <a:srgbClr val="1D4ED8"/>
+            </a:solidFill>
+            <a:prstDash val="solid"/>
+          </a:ln>
+        </p:spPr>
+        <p:txBody>
+          <a:bodyPr/>
+          <a:lstStyle/>
+          <a:p>
+            <a:endParaRPr lang="en-IN"/>
+          </a:p>
+        </p:txBody>
+      </p:sp>
+      <p:sp>
+        <p:nvSpPr>
+          <p:cNvPr id="19" name="Text 13"/>
+          <p:cNvSpPr txBox="1"/>
+          <p:nvPr/>
+        </p:nvSpPr>
+        <p:spPr>
+          <a:xfrm>
+            <a:off x="1790395" y="2945282"/>
+            <a:ext cx="9281160" cy="1050000"/>
+          </a:xfrm>
+          <a:prstGeom prst="rect">
+            <a:avLst/>
+          </a:prstGeom>
+          <a:noFill/>
+          <a:ln/>
+        </p:spPr>
+        <p:txBody>
+          <a:bodyPr wrap="square" lIns="0" tIns="0" rIns="0" bIns="0" rtlCol="0" anchor="ctr"/>
+          <a:lstStyle/>
+          <a:p>
+            <a:pPr marL="0" indent="0" algn="l">
+              <a:buNone/>
+            </a:pPr>
+            <a:r>
+              <a:rPr lang="en-US" sz="950" i="1" dirty="0">
+                <a:solidFill>
+                  <a:srgbClr val="FFFFFF">
+                    <a:alpha val="70000"/>
+                  </a:srgbClr>
+                </a:solidFill>
+                <a:latin typeface="Poppins" pitchFamily="34" charset="0"/>
+                <a:ea typeface="Poppins" pitchFamily="34" charset="-122"/>
+                <a:cs typeface="Poppins" pitchFamily="34" charset="-120"/>
+              </a:rPr>
+              <a:t>Disambiguation is posed as matched filtering: a tile's autocorrelation is its ambiguity function, so sidelobe height measures positional ambiguity directly.</a:t>
+            </a:r>
+            <a:endParaRPr lang="en-US" sz="1200" dirty="0"/>
+          </a:p>
+          <a:p>
+            <a:pPr marL="0" indent="0" algn="l">
+              <a:buNone/>
+            </a:pPr>
+            <a:r>
+              <a:rPr lang="en-US" sz="950" i="1" dirty="0">
+                <a:solidFill>
+                  <a:srgbClr val="FFFFFF">
+                    <a:alpha val="70000"/>
+                  </a:srgbClr>
+                </a:solidFill>
+                <a:latin typeface="Poppins" pitchFamily="34" charset="0"/>
+                <a:ea typeface="Poppins" pitchFamily="34" charset="-122"/>
+                <a:cs typeface="Poppins" pitchFamily="34" charset="-120"/>
+              </a:rPr>
+              <a:t>Layout dimensions are deliberately relaxed 1.5–5x from production silicon. At real ground rules the lattice reaches the 10 nm/px optic at 45% contrast, and at leading-edge fin pitch at 20% — at or below the shot-noise floor.</a:t>
+            </a:r>
+            <a:endParaRPr lang="en-US" sz="1200" dirty="0"/>
+          </a:p>
+          <a:p>
+            <a:pPr marL="0" indent="0" algn="l">
+              <a:buNone/>
+            </a:pPr>
+            <a:r>
+              <a:rPr lang="en-US" sz="950" i="1" dirty="0">
+                <a:solidFill>
+                  <a:srgbClr val="FFFFFF">
+                    <a:alpha val="70000"/>
+                  </a:srgbClr>
+                </a:solidFill>
+                <a:latin typeface="Poppins" pitchFamily="34" charset="0"/>
+                <a:ea typeface="Poppins" pitchFamily="34" charset="-122"/>
+                <a:cs typeface="Poppins" pitchFamily="34" charset="-120"/>
+              </a:rPr>
+              <a:t>Nyquist is not the binding constraint; contrast is. Every parameter is tagged as cited, partly cited, or a declared assumption.</a:t>
+            </a:r>
+            <a:endParaRPr lang="en-US" sz="1200" dirty="0"/>
+          </a:p>
+        </p:txBody>
+      </p:sp>
+      <p:sp>
+        <p:nvSpPr>
+          <p:cNvPr id="20" name="Shape 14"/>
+          <p:cNvSpPr/>
+          <p:nvPr/>
+        </p:nvSpPr>
+        <p:spPr>
+          <a:xfrm>
+            <a:off x="961949" y="4155034"/>
+            <a:ext cx="476402" cy="476402"/>
+          </a:xfrm>
+          <a:prstGeom prst="ellipse">
+            <a:avLst/>
+          </a:prstGeom>
+          <a:solidFill>
+            <a:srgbClr val="273383">
+              <a:alpha val="50000"/>
+            </a:srgbClr>
+          </a:solidFill>
+          <a:ln w="25400">
+            <a:solidFill>
+              <a:srgbClr val="AEFF82"/>
+            </a:solidFill>
+            <a:prstDash val="solid"/>
+          </a:ln>
+        </p:spPr>
+        <p:txBody>
+          <a:bodyPr/>
+          <a:lstStyle/>
+          <a:p>
+            <a:endParaRPr lang="en-IN"/>
+          </a:p>
+        </p:txBody>
+      </p:sp>
+      <p:pic>
+        <p:nvPicPr>
+          <p:cNvPr id="21" name="Image 4" descr="preencoded.png"/>
+          <p:cNvPicPr>
+            <a:picLocks noChangeAspect="1"/>
+          </p:cNvPicPr>
+          <p:nvPr/>
+        </p:nvPicPr>
+        <p:blipFill>
+          <a:blip r:embed="rId7"/>
+          <a:srcRect l="-80" r="-80"/>
+          <a:stretch/>
+        </p:blipFill>
+        <p:spPr>
+          <a:xfrm>
+            <a:off x="1057046" y="4279392"/>
+            <a:ext cx="286207" cy="228600"/>
+          </a:xfrm>
+          <a:prstGeom prst="rect">
+            <a:avLst/>
+          </a:prstGeom>
+        </p:spPr>
+      </p:pic>
+      <p:sp>
+        <p:nvSpPr>
+          <p:cNvPr id="22" name="Text 15"/>
+          <p:cNvSpPr txBox="1"/>
+          <p:nvPr/>
+        </p:nvSpPr>
+        <p:spPr>
+          <a:xfrm>
+            <a:off x="1628546" y="4155034"/>
+            <a:ext cx="2343607" cy="267005"/>
+          </a:xfrm>
+          <a:prstGeom prst="rect">
+            <a:avLst/>
+          </a:prstGeom>
+          <a:noFill/>
+          <a:ln/>
+        </p:spPr>
+        <p:txBody>
+          <a:bodyPr wrap="square" lIns="0" tIns="0" rIns="0" bIns="0" rtlCol="0" anchor="ctr"/>
+          <a:lstStyle/>
+          <a:p>
+            <a:pPr marL="0" indent="0" algn="l">
+              <a:buNone/>
+            </a:pPr>
+            <a:r>
+              <a:rPr lang="en-US" sz="1500" b="1" dirty="0">
+                <a:solidFill>
+                  <a:srgbClr val="88E555"/>
+                </a:solidFill>
+                <a:latin typeface="Poppins" pitchFamily="34" charset="0"/>
+                <a:ea typeface="Poppins" pitchFamily="34" charset="-122"/>
+                <a:cs typeface="Poppins" pitchFamily="34" charset="-120"/>
+              </a:rPr>
+              <a:t>References &amp; Citations</a:t>
+            </a:r>
+            <a:endParaRPr lang="en-US" sz="1500" dirty="0"/>
+          </a:p>
+        </p:txBody>
+      </p:sp>
+      <p:sp>
+        <p:nvSpPr>
+          <p:cNvPr id="23" name="Text 16"/>
+          <p:cNvSpPr txBox="1"/>
+          <p:nvPr/>
+        </p:nvSpPr>
+        <p:spPr>
+          <a:xfrm>
+            <a:off x="1628546" y="4497934"/>
+            <a:ext cx="2767889" cy="191110"/>
+          </a:xfrm>
+          <a:prstGeom prst="rect">
+            <a:avLst/>
+          </a:prstGeom>
+          <a:noFill/>
+          <a:ln/>
+        </p:spPr>
+        <p:txBody>
+          <a:bodyPr wrap="square" lIns="0" tIns="0" rIns="0" bIns="0" rtlCol="0" anchor="ctr"/>
+          <a:lstStyle/>
+          <a:p>
+            <a:pPr marL="0" indent="0" algn="l">
+              <a:buNone/>
+            </a:pPr>
+            <a:r>
+              <a:rPr lang="en-US" sz="1000" dirty="0">
+                <a:solidFill>
+                  <a:srgbClr val="D1D5DB"/>
+                </a:solidFill>
+                <a:latin typeface="Poppins" pitchFamily="34" charset="0"/>
+                <a:ea typeface="Poppins" pitchFamily="34" charset="-122"/>
+                <a:cs typeface="Poppins" pitchFamily="34" charset="-120"/>
+              </a:rPr>
+              <a:t>List key papers, articles, or data sources.</a:t>
+            </a:r>
+            <a:endParaRPr lang="en-US" sz="1000" dirty="0"/>
+          </a:p>
+        </p:txBody>
+      </p:sp>
+      <p:sp>
+        <p:nvSpPr>
+          <p:cNvPr id="24" name="Shape 17"/>
+          <p:cNvSpPr/>
+          <p:nvPr/>
+        </p:nvSpPr>
+        <p:spPr>
+          <a:xfrm>
+            <a:off x="1628546" y="4764938"/>
+            <a:ext cx="9601200" cy="1410005"/>
+          </a:xfrm>
+          <a:prstGeom prst="roundRect">
+            <a:avLst>
+              <a:gd name="adj" fmla="val 3505"/>
+            </a:avLst>
+          </a:prstGeom>
+          <a:solidFill>
+            <a:srgbClr val="1E3A8A">
+              <a:alpha val="40000"/>
+            </a:srgbClr>
+          </a:solidFill>
+          <a:ln w="12700">
+            <a:solidFill>
+              <a:srgbClr val="1D4ED8"/>
+            </a:solidFill>
+            <a:prstDash val="solid"/>
+          </a:ln>
+        </p:spPr>
+        <p:txBody>
+          <a:bodyPr/>
+          <a:lstStyle/>
+          <a:p>
+            <a:endParaRPr lang="en-IN"/>
+          </a:p>
+        </p:txBody>
+      </p:sp>
+      <p:sp>
+        <p:nvSpPr>
+          <p:cNvPr id="25" name="Shape 18"/>
+          <p:cNvSpPr/>
+          <p:nvPr/>
+        </p:nvSpPr>
+        <p:spPr>
+          <a:xfrm>
+            <a:off x="1790395" y="5232197"/>
+            <a:ext cx="9277502" cy="9144"/>
+          </a:xfrm>
+          <a:prstGeom prst="rect">
+            <a:avLst/>
+          </a:prstGeom>
+          <a:solidFill>
+            <a:srgbClr val="1E40AF">
+              <a:alpha val="30000"/>
+            </a:srgbClr>
+          </a:solidFill>
+          <a:ln/>
+        </p:spPr>
+        <p:txBody>
+          <a:bodyPr/>
+          <a:lstStyle/>
+          <a:p>
+            <a:endParaRPr lang="en-IN"/>
+          </a:p>
+        </p:txBody>
+      </p:sp>
+      <p:sp>
+        <p:nvSpPr>
+          <p:cNvPr id="26" name="Text 19"/>
+          <p:cNvSpPr txBox="1"/>
+          <p:nvPr/>
+        </p:nvSpPr>
+        <p:spPr>
+          <a:xfrm>
+            <a:off x="1790395" y="4926787"/>
+            <a:ext cx="9281160" cy="300000"/>
+          </a:xfrm>
+          <a:prstGeom prst="rect">
+            <a:avLst/>
+          </a:prstGeom>
+          <a:noFill/>
+          <a:ln/>
+        </p:spPr>
+        <p:txBody>
+          <a:bodyPr wrap="square" lIns="0" tIns="0" rIns="0" bIns="0" rtlCol="0" anchor="ctr"/>
+          <a:lstStyle/>
+          <a:p>
+            <a:pPr marL="0" indent="0" algn="l">
+              <a:buNone/>
+            </a:pPr>
+            <a:r>
+              <a:rPr lang="en-US" sz="1200" dirty="0">
+                <a:solidFill>
+                  <a:srgbClr val="FFFFFF">
+                    <a:alpha val="80000"/>
+                  </a:srgbClr>
+                </a:solidFill>
+                <a:latin typeface="Poppins" pitchFamily="34" charset="0"/>
+                <a:ea typeface="Poppins" pitchFamily="34" charset="-122"/>
+                <a:cs typeface="Poppins" pitchFamily="34" charset="-120"/>
+              </a:rPr>
+              <a:t>Lewis, J.P. (1995). Fast Normalized Cross-Correlation. Vision Interface.</a:t>
+            </a:r>
+            <a:endParaRPr lang="en-US" sz="1200" dirty="0"/>
+          </a:p>
+        </p:txBody>
+      </p:sp>
+      <p:sp>
+        <p:nvSpPr>
+          <p:cNvPr id="27" name="Shape 20"/>
+          <p:cNvSpPr/>
+          <p:nvPr/>
+        </p:nvSpPr>
+        <p:spPr>
+          <a:xfrm>
+            <a:off x="1790395" y="5661050"/>
+            <a:ext cx="9277502" cy="9144"/>
+          </a:xfrm>
+          <a:prstGeom prst="rect">
+            <a:avLst/>
+          </a:prstGeom>
+          <a:solidFill>
+            <a:srgbClr val="1E40AF">
+              <a:alpha val="30000"/>
+            </a:srgbClr>
+          </a:solidFill>
+          <a:ln/>
+        </p:spPr>
+        <p:txBody>
+          <a:bodyPr/>
+          <a:lstStyle/>
+          <a:p>
+            <a:endParaRPr lang="en-IN"/>
+          </a:p>
+        </p:txBody>
+      </p:sp>
+      <p:sp>
+        <p:nvSpPr>
+          <p:cNvPr id="28" name="Text 21"/>
+          <p:cNvSpPr txBox="1"/>
+          <p:nvPr/>
+        </p:nvSpPr>
+        <p:spPr>
+          <a:xfrm>
+            <a:off x="1790395" y="5355641"/>
+            <a:ext cx="9281160" cy="300000"/>
+          </a:xfrm>
+          <a:prstGeom prst="rect">
+            <a:avLst/>
+          </a:prstGeom>
+          <a:noFill/>
+          <a:ln/>
+        </p:spPr>
+        <p:txBody>
+          <a:bodyPr wrap="square" lIns="0" tIns="0" rIns="0" bIns="0" rtlCol="0" anchor="ctr"/>
+          <a:lstStyle/>
+          <a:p>
+            <a:pPr marL="0" indent="0" algn="l">
+              <a:buNone/>
+            </a:pPr>
+            <a:r>
+              <a:rPr lang="en-US" sz="1200" dirty="0">
+                <a:solidFill>
+                  <a:srgbClr val="FFFFFF">
+                    <a:alpha val="80000"/>
+                  </a:srgbClr>
+                </a:solidFill>
+                <a:latin typeface="Poppins" pitchFamily="34" charset="0"/>
+                <a:ea typeface="Poppins" pitchFamily="34" charset="-122"/>
+                <a:cs typeface="Poppins" pitchFamily="34" charset="-120"/>
+              </a:rPr>
+              <a:t>Reddy &amp; Chatterji (1996). FFT-based translation, rotation and scale-invariant registration. IEEE Trans. Image Processing 5(8).</a:t>
+            </a:r>
+            <a:endParaRPr lang="en-US" sz="1200" dirty="0"/>
+          </a:p>
+        </p:txBody>
+      </p:sp>
+      <p:sp>
+        <p:nvSpPr>
+          <p:cNvPr id="29" name="Text 22"/>
+          <p:cNvSpPr txBox="1"/>
+          <p:nvPr/>
+        </p:nvSpPr>
+        <p:spPr>
+          <a:xfrm>
+            <a:off x="1790395" y="5783580"/>
+            <a:ext cx="9281160" cy="300000"/>
+          </a:xfrm>
+          <a:prstGeom prst="rect">
+            <a:avLst/>
+          </a:prstGeom>
+          <a:noFill/>
+          <a:ln/>
+        </p:spPr>
+        <p:txBody>
+          <a:bodyPr wrap="square" lIns="0" tIns="0" rIns="0" bIns="0" rtlCol="0" anchor="ctr"/>
+          <a:lstStyle/>
+          <a:p>
+            <a:pPr marL="0" indent="0" algn="l">
+              <a:buNone/>
+            </a:pPr>
+            <a:r>
+              <a:rPr lang="en-US" sz="1200" dirty="0">
+                <a:solidFill>
+                  <a:srgbClr val="FFFFFF">
+                    <a:alpha val="80000"/>
+                  </a:srgbClr>
+                </a:solidFill>
+                <a:latin typeface="Poppins" pitchFamily="34" charset="0"/>
+                <a:ea typeface="Poppins" pitchFamily="34" charset="-122"/>
+                <a:cs typeface="Poppins" pitchFamily="34" charset="-120"/>
+              </a:rPr>
+              <a:t>Guizar-Sicairos, Thurman &amp; Fienup (2008). Efficient subpixel image registration. Optics Letters 33(2).</a:t>
+            </a:r>
+            <a:endParaRPr lang="en-US" sz="1200" dirty="0"/>
+          </a:p>
+        </p:txBody>
+      </p:sp>
+      <p:pic>
+        <p:nvPicPr>
+          <p:cNvPr id="30" name="Picture 29">
+            <a:extLst>
+              <a:ext uri="{FF2B5EF4-FFF2-40B4-BE49-F238E27FC236}">
+                <a16:creationId xmlns:a16="http://schemas.microsoft.com/office/drawing/2014/main" id="{135E3709-F1C8-6E84-EA51-720EFCF71B26}"/>
+              </a:ext>
+            </a:extLst>
+          </p:cNvPr>
+          <p:cNvPicPr>
+            <a:picLocks noChangeAspect="1"/>
+          </p:cNvPicPr>
+          <p:nvPr/>
+        </p:nvPicPr>
+        <p:blipFill>
+          <a:blip r:embed="rId8"/>
+          <a:stretch>
+            <a:fillRect/>
+          </a:stretch>
+        </p:blipFill>
+        <p:spPr>
+          <a:xfrm>
+            <a:off x="5292164" y="227710"/>
+            <a:ext cx="1607366" cy="783591"/>
+          </a:xfrm>
+          <a:prstGeom prst="rect">
+            <a:avLst/>
+          </a:prstGeom>
+        </p:spPr>
+      </p:pic>
+      <p:sp>
+        <p:nvSpPr>
+          <p:cNvPr id="32" name="Shape 1">
+            <a:extLst>
+              <a:ext uri="{FF2B5EF4-FFF2-40B4-BE49-F238E27FC236}">
+                <a16:creationId xmlns:a16="http://schemas.microsoft.com/office/drawing/2014/main" id="{3E27E131-AC1D-E75C-0267-02565ACC1BC3}"/>
+              </a:ext>
+            </a:extLst>
+          </p:cNvPr>
+          <p:cNvSpPr/>
+          <p:nvPr/>
+        </p:nvSpPr>
+        <p:spPr>
+          <a:xfrm>
+            <a:off x="571500" y="259714"/>
+            <a:ext cx="11048695" cy="857707"/>
+          </a:xfrm>
+          <a:prstGeom prst="roundRect">
+            <a:avLst>
+              <a:gd name="adj" fmla="val 9476"/>
+            </a:avLst>
+          </a:prstGeom>
+          <a:solidFill>
+            <a:srgbClr val="FFFFFF">
+              <a:alpha val="95000"/>
+            </a:srgbClr>
+          </a:solidFill>
+          <a:ln/>
+          <a:effectLst>
+            <a:outerShdw blurRad="63500" dist="38100" dir="5400000" algn="bl" rotWithShape="0">
+              <a:srgbClr val="000000">
+                <a:alpha val="10000"/>
+              </a:srgbClr>
+            </a:outerShdw>
+          </a:effectLst>
+        </p:spPr>
+        <p:txBody>
+          <a:bodyPr/>
+          <a:lstStyle/>
+          <a:p>
+            <a:endParaRPr lang="en-IN"/>
+          </a:p>
+        </p:txBody>
+      </p:sp>
+      <p:pic>
+        <p:nvPicPr>
+          <p:cNvPr id="33" name="Picture 32">
+            <a:extLst>
+              <a:ext uri="{FF2B5EF4-FFF2-40B4-BE49-F238E27FC236}">
+                <a16:creationId xmlns:a16="http://schemas.microsoft.com/office/drawing/2014/main" id="{1D876DBE-D402-1B41-B952-69F6F5BF98C9}"/>
+              </a:ext>
+            </a:extLst>
+          </p:cNvPr>
+          <p:cNvPicPr>
+            <a:picLocks noChangeAspect="1"/>
+          </p:cNvPicPr>
+          <p:nvPr/>
+        </p:nvPicPr>
+        <p:blipFill>
+          <a:blip r:embed="rId9">
+            <a:extLst>
+              <a:ext uri="{28A0092B-C50C-407E-A947-70E740481C1C}">
+                <a14:useLocalDpi xmlns:a14="http://schemas.microsoft.com/office/drawing/2010/main" val="0"/>
+              </a:ext>
+            </a:extLst>
+          </a:blip>
+          <a:stretch>
+            <a:fillRect/>
+          </a:stretch>
+        </p:blipFill>
+        <p:spPr>
+          <a:xfrm>
+            <a:off x="1514101" y="390016"/>
             <a:ext cx="9163491" cy="586435"/>
           </a:xfrm>
           <a:prstGeom prst="rect">

--- a/docs/DriftSense_PS02.pptx
+++ b/docs/DriftSense_PS02.pptx
@@ -7771,7 +7771,7 @@
                 <a:ea typeface="Poppins" pitchFamily="34" charset="-122"/>
                 <a:cs typeface="Poppins" pitchFamily="34" charset="-120"/>
               </a:rPr>
-              <a:t>588 tests, CI on every push, and a clean-room check that unpacks the archive and runs it with no developer environment present.</a:t>
+              <a:t>597 tests, CI on every push, and a clean-room check that unpacks the archive and runs it with no developer environment present.</a:t>
             </a:r>
             <a:endParaRPr lang="en-US" sz="1300" dirty="0"/>
           </a:p>
